--- a/training/slides/Module_05_Response_Surface.pptx
+++ b/training/slides/Module_05_Response_Surface.pptx
@@ -15,9 +15,6 @@
     <p:sldId id="263" r:id="rId14"/>
     <p:sldId id="264" r:id="rId15"/>
     <p:sldId id="265" r:id="rId16"/>
-    <p:sldId id="266" r:id="rId17"/>
-    <p:sldId id="267" r:id="rId18"/>
-    <p:sldId id="268" r:id="rId19"/>
   </p:sldIdLst>
   <p:sldSz cx="12191695" cy="6858000" type="screen4x3"/>
   <p:notesSz cx="6858000" cy="9144000"/>
@@ -3096,7 +3093,7 @@
     <p:bg>
       <p:bgPr>
         <a:solidFill>
-          <a:srgbClr val="1A1A2E"/>
+          <a:srgbClr val="1E1B4B"/>
         </a:solidFill>
         <a:effectLst/>
       </p:bgPr>
@@ -3117,13 +3114,13 @@
         <p:spPr>
           <a:xfrm>
             <a:off x="0" y="0"/>
-            <a:ext cx="137160" cy="6858000"/>
+            <a:ext cx="5943600" cy="6858000"/>
           </a:xfrm>
           <a:prstGeom prst="rect">
             <a:avLst/>
           </a:prstGeom>
           <a:solidFill>
-            <a:srgbClr val="007BFF"/>
+            <a:srgbClr val="1E1B4B"/>
           </a:solidFill>
           <a:ln>
             <a:noFill/>
@@ -3153,50 +3150,288 @@
       </p:sp>
       <p:sp>
         <p:nvSpPr>
-          <p:cNvPr id="3" name="TextBox 2"/>
+          <p:cNvPr id="3" name="Rectangle 2"/>
+          <p:cNvSpPr/>
+          <p:nvPr/>
+        </p:nvSpPr>
+        <p:spPr>
+          <a:xfrm>
+            <a:off x="5943600" y="0"/>
+            <a:ext cx="3200400" cy="6858000"/>
+          </a:xfrm>
+          <a:prstGeom prst="rect">
+            <a:avLst/>
+          </a:prstGeom>
+          <a:solidFill>
+            <a:srgbClr val="312E81"/>
+          </a:solidFill>
+          <a:ln>
+            <a:noFill/>
+          </a:ln>
+        </p:spPr>
+        <p:style>
+          <a:lnRef idx="1">
+            <a:schemeClr val="accent1"/>
+          </a:lnRef>
+          <a:fillRef idx="3">
+            <a:schemeClr val="accent1"/>
+          </a:fillRef>
+          <a:effectRef idx="2">
+            <a:schemeClr val="accent1"/>
+          </a:effectRef>
+          <a:fontRef idx="minor">
+            <a:schemeClr val="lt1"/>
+          </a:fontRef>
+        </p:style>
+        <p:txBody>
+          <a:bodyPr rtlCol="0" anchor="ctr"/>
+          <a:lstStyle/>
+          <a:p>
+            <a:pPr algn="ctr"/>
+          </a:p>
+        </p:txBody>
+      </p:sp>
+      <p:sp>
+        <p:nvSpPr>
+          <p:cNvPr id="4" name="Rectangle 3"/>
+          <p:cNvSpPr/>
+          <p:nvPr/>
+        </p:nvSpPr>
+        <p:spPr>
+          <a:xfrm>
+            <a:off x="9144000" y="0"/>
+            <a:ext cx="3047695" cy="6858000"/>
+          </a:xfrm>
+          <a:prstGeom prst="rect">
+            <a:avLst/>
+          </a:prstGeom>
+          <a:solidFill>
+            <a:srgbClr val="4338CA"/>
+          </a:solidFill>
+          <a:ln>
+            <a:noFill/>
+          </a:ln>
+        </p:spPr>
+        <p:style>
+          <a:lnRef idx="1">
+            <a:schemeClr val="accent1"/>
+          </a:lnRef>
+          <a:fillRef idx="3">
+            <a:schemeClr val="accent1"/>
+          </a:fillRef>
+          <a:effectRef idx="2">
+            <a:schemeClr val="accent1"/>
+          </a:effectRef>
+          <a:fontRef idx="minor">
+            <a:schemeClr val="lt1"/>
+          </a:fontRef>
+        </p:style>
+        <p:txBody>
+          <a:bodyPr rtlCol="0" anchor="ctr"/>
+          <a:lstStyle/>
+          <a:p>
+            <a:pPr algn="ctr"/>
+          </a:p>
+        </p:txBody>
+      </p:sp>
+      <p:sp>
+        <p:nvSpPr>
+          <p:cNvPr id="5" name="Rectangle 4"/>
+          <p:cNvSpPr/>
+          <p:nvPr/>
+        </p:nvSpPr>
+        <p:spPr>
+          <a:xfrm>
+            <a:off x="0" y="0"/>
+            <a:ext cx="73152" cy="6858000"/>
+          </a:xfrm>
+          <a:prstGeom prst="rect">
+            <a:avLst/>
+          </a:prstGeom>
+          <a:solidFill>
+            <a:srgbClr val="6366F1"/>
+          </a:solidFill>
+          <a:ln>
+            <a:noFill/>
+          </a:ln>
+        </p:spPr>
+        <p:style>
+          <a:lnRef idx="1">
+            <a:schemeClr val="accent1"/>
+          </a:lnRef>
+          <a:fillRef idx="3">
+            <a:schemeClr val="accent1"/>
+          </a:fillRef>
+          <a:effectRef idx="2">
+            <a:schemeClr val="accent1"/>
+          </a:effectRef>
+          <a:fontRef idx="minor">
+            <a:schemeClr val="lt1"/>
+          </a:fontRef>
+        </p:style>
+        <p:txBody>
+          <a:bodyPr rtlCol="0" anchor="ctr"/>
+          <a:lstStyle/>
+          <a:p>
+            <a:pPr algn="ctr"/>
+          </a:p>
+        </p:txBody>
+      </p:sp>
+      <p:sp>
+        <p:nvSpPr>
+          <p:cNvPr id="6" name="Oval 5"/>
+          <p:cNvSpPr/>
+          <p:nvPr/>
+        </p:nvSpPr>
+        <p:spPr>
+          <a:xfrm>
+            <a:off x="8229600" y="-914400"/>
+            <a:ext cx="4572000" cy="4572000"/>
+          </a:xfrm>
+          <a:prstGeom prst="ellipse">
+            <a:avLst/>
+          </a:prstGeom>
+          <a:solidFill>
+            <a:srgbClr val="6366F1">
+              <a:lumMod val="70000"/>
+              <a:lumOff val="30000"/>
+            </a:srgbClr>
+          </a:solidFill>
+          <a:ln>
+            <a:noFill/>
+          </a:ln>
+        </p:spPr>
+        <p:style>
+          <a:lnRef idx="1">
+            <a:schemeClr val="accent1"/>
+          </a:lnRef>
+          <a:fillRef idx="3">
+            <a:schemeClr val="accent1"/>
+          </a:fillRef>
+          <a:effectRef idx="2">
+            <a:schemeClr val="accent1"/>
+          </a:effectRef>
+          <a:fontRef idx="minor">
+            <a:schemeClr val="lt1"/>
+          </a:fontRef>
+        </p:style>
+        <p:txBody>
+          <a:bodyPr rtlCol="0" anchor="ctr"/>
+          <a:lstStyle/>
+          <a:p>
+            <a:pPr algn="ctr"/>
+          </a:p>
+        </p:txBody>
+      </p:sp>
+      <p:sp>
+        <p:nvSpPr>
+          <p:cNvPr id="7" name="Oval 6"/>
+          <p:cNvSpPr/>
+          <p:nvPr/>
+        </p:nvSpPr>
+        <p:spPr>
+          <a:xfrm>
+            <a:off x="-914400" y="3657600"/>
+            <a:ext cx="3657600" cy="3657600"/>
+          </a:xfrm>
+          <a:prstGeom prst="ellipse">
+            <a:avLst/>
+          </a:prstGeom>
+          <a:solidFill>
+            <a:srgbClr val="5046E5">
+              <a:lumMod val="60000"/>
+              <a:lumOff val="40000"/>
+            </a:srgbClr>
+          </a:solidFill>
+          <a:ln>
+            <a:noFill/>
+          </a:ln>
+        </p:spPr>
+        <p:style>
+          <a:lnRef idx="1">
+            <a:schemeClr val="accent1"/>
+          </a:lnRef>
+          <a:fillRef idx="3">
+            <a:schemeClr val="accent1"/>
+          </a:fillRef>
+          <a:effectRef idx="2">
+            <a:schemeClr val="accent1"/>
+          </a:effectRef>
+          <a:fontRef idx="minor">
+            <a:schemeClr val="lt1"/>
+          </a:fontRef>
+        </p:style>
+        <p:txBody>
+          <a:bodyPr rtlCol="0" anchor="ctr"/>
+          <a:lstStyle/>
+          <a:p>
+            <a:pPr algn="ctr"/>
+          </a:p>
+        </p:txBody>
+      </p:sp>
+      <p:sp>
+        <p:nvSpPr>
+          <p:cNvPr id="8" name="Rounded Rectangle 7"/>
+          <p:cNvSpPr/>
+          <p:nvPr/>
+        </p:nvSpPr>
+        <p:spPr>
+          <a:xfrm>
+            <a:off x="914400" y="1371600"/>
+            <a:ext cx="2377440" cy="438912"/>
+          </a:xfrm>
+          <a:prstGeom prst="roundRect">
+            <a:avLst/>
+          </a:prstGeom>
+          <a:solidFill>
+            <a:srgbClr val="312E81"/>
+          </a:solidFill>
+          <a:ln>
+            <a:noFill/>
+          </a:ln>
+        </p:spPr>
+        <p:style>
+          <a:lnRef idx="1">
+            <a:schemeClr val="accent1"/>
+          </a:lnRef>
+          <a:fillRef idx="3">
+            <a:schemeClr val="accent1"/>
+          </a:fillRef>
+          <a:effectRef idx="2">
+            <a:schemeClr val="accent1"/>
+          </a:effectRef>
+          <a:fontRef idx="minor">
+            <a:schemeClr val="lt1"/>
+          </a:fontRef>
+        </p:style>
+        <p:txBody>
+          <a:bodyPr rtlCol="0" anchor="ctr" lIns="137160"/>
+          <a:lstStyle/>
+          <a:p>
+            <a:pPr algn="l">
+              <a:defRPr sz="1400" b="1">
+                <a:solidFill>
+                  <a:srgbClr val="C7D2FE"/>
+                </a:solidFill>
+                <a:latin typeface="Consolas"/>
+              </a:defRPr>
+            </a:pPr>
+            <a:r>
+              <a:t>MODULE 5</a:t>
+            </a:r>
+          </a:p>
+        </p:txBody>
+      </p:sp>
+      <p:sp>
+        <p:nvSpPr>
+          <p:cNvPr id="9" name="TextBox 8"/>
           <p:cNvSpPr txBox="1"/>
           <p:nvPr/>
         </p:nvSpPr>
         <p:spPr>
           <a:xfrm>
-            <a:off x="914400" y="1097280"/>
-            <a:ext cx="10058400" cy="731520"/>
-          </a:xfrm>
-          <a:prstGeom prst="rect">
-            <a:avLst/>
-          </a:prstGeom>
-          <a:noFill/>
-        </p:spPr>
-        <p:txBody>
-          <a:bodyPr wrap="none">
-            <a:spAutoFit/>
-          </a:bodyPr>
-          <a:lstStyle/>
-          <a:p>
-            <a:pPr>
-              <a:defRPr sz="2000" b="1">
-                <a:solidFill>
-                  <a:srgbClr val="007BFF"/>
-                </a:solidFill>
-                <a:latin typeface="Calibri"/>
-              </a:defRPr>
-            </a:pPr>
-            <a:r>
-              <a:t>MODULE 5</a:t>
-            </a:r>
-          </a:p>
-        </p:txBody>
-      </p:sp>
-      <p:sp>
-        <p:nvSpPr>
-          <p:cNvPr id="4" name="TextBox 3"/>
-          <p:cNvSpPr txBox="1"/>
-          <p:nvPr/>
-        </p:nvSpPr>
-        <p:spPr>
-          <a:xfrm>
-            <a:off x="914400" y="2011680"/>
-            <a:ext cx="10058400" cy="1828800"/>
+            <a:off x="914400" y="2286000"/>
+            <a:ext cx="9144000" cy="2011680"/>
           </a:xfrm>
           <a:prstGeom prst="rect">
             <a:avLst/>
@@ -3209,30 +3444,34 @@
           </a:bodyPr>
           <a:lstStyle/>
           <a:p>
-            <a:pPr>
-              <a:defRPr sz="4400" b="1">
+            <a:pPr algn="l">
+              <a:defRPr sz="4000" b="1">
                 <a:solidFill>
                   <a:srgbClr val="FFFFFF"/>
                 </a:solidFill>
-                <a:latin typeface="Calibri"/>
-              </a:defRPr>
-            </a:pPr>
-            <a:r>
-              <a:t>Response Surface Designs</a:t>
-            </a:r>
-          </a:p>
-        </p:txBody>
-      </p:sp>
-      <p:sp>
-        <p:nvSpPr>
-          <p:cNvPr id="5" name="TextBox 4"/>
+                <a:latin typeface="Inter"/>
+              </a:defRPr>
+            </a:pPr>
+            <a:r>
+              <a:t>Response Surface</a:t>
+            </a:r>
+            <a:br/>
+            <a:r>
+              <a:t>Designs</a:t>
+            </a:r>
+          </a:p>
+        </p:txBody>
+      </p:sp>
+      <p:sp>
+        <p:nvSpPr>
+          <p:cNvPr id="10" name="TextBox 9"/>
           <p:cNvSpPr txBox="1"/>
           <p:nvPr/>
         </p:nvSpPr>
         <p:spPr>
           <a:xfrm>
-            <a:off x="914400" y="4114800"/>
-            <a:ext cx="9144000" cy="1371600"/>
+            <a:off x="914400" y="4389120"/>
+            <a:ext cx="8686800" cy="1371600"/>
           </a:xfrm>
           <a:prstGeom prst="rect">
             <a:avLst/>
@@ -3245,12 +3484,12 @@
           </a:bodyPr>
           <a:lstStyle/>
           <a:p>
-            <a:pPr>
-              <a:defRPr sz="2200">
-                <a:solidFill>
-                  <a:srgbClr val="CCCCCC"/>
-                </a:solidFill>
-                <a:latin typeface="Calibri"/>
+            <a:pPr algn="l">
+              <a:defRPr sz="1900" b="0">
+                <a:solidFill>
+                  <a:srgbClr val="A5B4FC"/>
+                </a:solidFill>
+                <a:latin typeface="Inter"/>
               </a:defRPr>
             </a:pPr>
             <a:r>
@@ -3261,14 +3500,14 @@
       </p:sp>
       <p:sp>
         <p:nvSpPr>
-          <p:cNvPr id="6" name="TextBox 5"/>
+          <p:cNvPr id="11" name="TextBox 10"/>
           <p:cNvSpPr txBox="1"/>
           <p:nvPr/>
         </p:nvSpPr>
         <p:spPr>
           <a:xfrm>
-            <a:off x="914400" y="6126480"/>
-            <a:ext cx="10058400" cy="457200"/>
+            <a:off x="731520" y="6400800"/>
+            <a:ext cx="10058400" cy="365760"/>
           </a:xfrm>
           <a:prstGeom prst="rect">
             <a:avLst/>
@@ -3281,16 +3520,16 @@
           </a:bodyPr>
           <a:lstStyle/>
           <a:p>
-            <a:pPr>
-              <a:defRPr sz="1200">
-                <a:solidFill>
-                  <a:srgbClr val="888888"/>
-                </a:solidFill>
-                <a:latin typeface="Calibri"/>
-              </a:defRPr>
-            </a:pPr>
-            <a:r>
-              <a:t>Copyright © 2026 Martin J. Gallagher. Licensed under GPL-3.0-or-later.</a:t>
+            <a:pPr algn="l">
+              <a:defRPr sz="1000" b="0">
+                <a:solidFill>
+                  <a:srgbClr val="6366F1"/>
+                </a:solidFill>
+                <a:latin typeface="Consolas"/>
+              </a:defRPr>
+            </a:pPr>
+            <a:r>
+              <a:t>© 2026 Martin J. Gallagher  |  GPL-3.0-or-later  |  doehelper.com</a:t>
             </a:r>
           </a:p>
         </p:txBody>
@@ -3309,7 +3548,7 @@
     <p:bg>
       <p:bgPr>
         <a:solidFill>
-          <a:srgbClr val="FFFFFF"/>
+          <a:srgbClr val="FAFAFA"/>
         </a:solidFill>
         <a:effectLst/>
       </p:bgPr>
@@ -3330,13 +3569,13 @@
         <p:spPr>
           <a:xfrm>
             <a:off x="0" y="0"/>
-            <a:ext cx="12191695" cy="54864"/>
+            <a:ext cx="12191695" cy="45720"/>
           </a:xfrm>
           <a:prstGeom prst="rect">
             <a:avLst/>
           </a:prstGeom>
           <a:solidFill>
-            <a:srgbClr val="007BFF"/>
+            <a:srgbClr val="D97706"/>
           </a:solidFill>
           <a:ln>
             <a:noFill/>
@@ -3366,217 +3605,20 @@
       </p:sp>
       <p:sp>
         <p:nvSpPr>
-          <p:cNvPr id="3" name="TextBox 2"/>
-          <p:cNvSpPr txBox="1"/>
-          <p:nvPr/>
-        </p:nvSpPr>
-        <p:spPr>
-          <a:xfrm>
-            <a:off x="731520" y="365760"/>
-            <a:ext cx="10515600" cy="822960"/>
-          </a:xfrm>
-          <a:prstGeom prst="rect">
-            <a:avLst/>
-          </a:prstGeom>
-          <a:noFill/>
-        </p:spPr>
-        <p:txBody>
-          <a:bodyPr wrap="square">
-            <a:spAutoFit/>
-          </a:bodyPr>
-          <a:lstStyle/>
-          <a:p>
-            <a:pPr>
-              <a:defRPr sz="3200" b="1">
-                <a:solidFill>
-                  <a:srgbClr val="222222"/>
-                </a:solidFill>
-                <a:latin typeface="Calibri"/>
-              </a:defRPr>
-            </a:pPr>
-            <a:r>
-              <a:t>Steepest Ascent / Descent</a:t>
-            </a:r>
-          </a:p>
-        </p:txBody>
-      </p:sp>
-      <p:sp>
-        <p:nvSpPr>
-          <p:cNvPr id="4" name="TextBox 3"/>
-          <p:cNvSpPr txBox="1"/>
-          <p:nvPr/>
-        </p:nvSpPr>
-        <p:spPr>
-          <a:xfrm>
-            <a:off x="914400" y="1463040"/>
-            <a:ext cx="10058400" cy="4754880"/>
-          </a:xfrm>
-          <a:prstGeom prst="rect">
-            <a:avLst/>
-          </a:prstGeom>
-          <a:noFill/>
-        </p:spPr>
-        <p:txBody>
-          <a:bodyPr wrap="square">
-            <a:spAutoFit/>
-          </a:bodyPr>
-          <a:lstStyle/>
-          <a:p>
-            <a:pPr>
-              <a:spcAft>
-                <a:spcPts val="800"/>
-              </a:spcAft>
-              <a:defRPr sz="2200" b="0">
-                <a:solidFill>
-                  <a:srgbClr val="222222"/>
-                </a:solidFill>
-                <a:latin typeface="Calibri"/>
-              </a:defRPr>
-            </a:pPr>
-            <a:r>
-              <a:t>Sequential experimentation strategy</a:t>
-            </a:r>
-          </a:p>
-          <a:p>
-            <a:pPr>
-              <a:spcAft>
-                <a:spcPts val="800"/>
-              </a:spcAft>
-              <a:defRPr sz="2200" b="0">
-                <a:solidFill>
-                  <a:srgbClr val="222222"/>
-                </a:solidFill>
-                <a:latin typeface="Calibri"/>
-              </a:defRPr>
-            </a:pPr>
-            <a:r>
-              <a:t>Start with a factorial/screening design near current settings</a:t>
-            </a:r>
-          </a:p>
-          <a:p>
-            <a:pPr>
-              <a:spcAft>
-                <a:spcPts val="800"/>
-              </a:spcAft>
-              <a:defRPr sz="2200" b="0">
-                <a:solidFill>
-                  <a:srgbClr val="222222"/>
-                </a:solidFill>
-                <a:latin typeface="Calibri"/>
-              </a:defRPr>
-            </a:pPr>
-            <a:r>
-              <a:t>Fit a linear model to identify the steepest ascent direction</a:t>
-            </a:r>
-          </a:p>
-          <a:p>
-            <a:pPr>
-              <a:spcAft>
-                <a:spcPts val="800"/>
-              </a:spcAft>
-              <a:defRPr sz="2200" b="0">
-                <a:solidFill>
-                  <a:srgbClr val="222222"/>
-                </a:solidFill>
-                <a:latin typeface="Calibri"/>
-              </a:defRPr>
-            </a:pPr>
-            <a:r>
-              <a:t>Run experiments along this path until response stops improving</a:t>
-            </a:r>
-          </a:p>
-          <a:p>
-            <a:pPr>
-              <a:spcAft>
-                <a:spcPts val="800"/>
-              </a:spcAft>
-              <a:defRPr sz="2200" b="0">
-                <a:solidFill>
-                  <a:srgbClr val="222222"/>
-                </a:solidFill>
-                <a:latin typeface="Calibri"/>
-              </a:defRPr>
-            </a:pPr>
-            <a:r>
-              <a:t>Then run a new RSM design at the plateau</a:t>
-            </a:r>
-          </a:p>
-          <a:p>
-            <a:pPr>
-              <a:spcAft>
-                <a:spcPts val="800"/>
-              </a:spcAft>
-              <a:defRPr sz="2200" b="0">
-                <a:solidFill>
-                  <a:srgbClr val="222222"/>
-                </a:solidFill>
-                <a:latin typeface="Calibri"/>
-              </a:defRPr>
-            </a:pPr>
-            <a:r>
-              <a:t>doe-helper computes the steepest ascent path automatically</a:t>
-            </a:r>
-          </a:p>
-          <a:p>
-            <a:pPr>
-              <a:spcAft>
-                <a:spcPts val="800"/>
-              </a:spcAft>
-              <a:defRPr sz="2200" b="0">
-                <a:solidFill>
-                  <a:srgbClr val="222222"/>
-                </a:solidFill>
-                <a:latin typeface="Calibri"/>
-              </a:defRPr>
-            </a:pPr>
-            <a:r>
-              <a:t>Efficient when you're far from the optimum</a:t>
-            </a:r>
-          </a:p>
-        </p:txBody>
-      </p:sp>
-    </p:spTree>
-  </p:cSld>
-  <p:clrMapOvr>
-    <a:masterClrMapping/>
-  </p:clrMapOvr>
-</p:sld>
-</file>
-
-<file path=ppt/slides/slide11.xml><?xml version="1.0" encoding="utf-8"?>
-<p:sld xmlns:a="http://schemas.openxmlformats.org/drawingml/2006/main" xmlns:p="http://schemas.openxmlformats.org/presentationml/2006/main" xmlns:r="http://schemas.openxmlformats.org/officeDocument/2006/relationships">
-  <p:cSld>
-    <p:bg>
-      <p:bgPr>
-        <a:solidFill>
-          <a:srgbClr val="FFFFFF"/>
-        </a:solidFill>
-        <a:effectLst/>
-      </p:bgPr>
-    </p:bg>
-    <p:spTree>
-      <p:nvGrpSpPr>
-        <p:cNvPr id="1" name=""/>
-        <p:cNvGrpSpPr/>
-        <p:nvPr/>
-      </p:nvGrpSpPr>
-      <p:grpSpPr/>
-      <p:sp>
-        <p:nvSpPr>
-          <p:cNvPr id="2" name="Rectangle 1"/>
+          <p:cNvPr id="3" name="Rounded Rectangle 2"/>
           <p:cNvSpPr/>
           <p:nvPr/>
         </p:nvSpPr>
         <p:spPr>
           <a:xfrm>
-            <a:off x="0" y="0"/>
-            <a:ext cx="12191695" cy="54864"/>
-          </a:xfrm>
-          <a:prstGeom prst="rect">
+            <a:off x="548640" y="274320"/>
+            <a:ext cx="2194560" cy="457200"/>
+          </a:xfrm>
+          <a:prstGeom prst="roundRect">
             <a:avLst/>
           </a:prstGeom>
           <a:solidFill>
-            <a:srgbClr val="007BFF"/>
+            <a:srgbClr val="D97706"/>
           </a:solidFill>
           <a:ln>
             <a:noFill/>
@@ -3600,20 +3642,30 @@
           <a:bodyPr rtlCol="0" anchor="ctr"/>
           <a:lstStyle/>
           <a:p>
-            <a:pPr algn="ctr"/>
-          </a:p>
-        </p:txBody>
-      </p:sp>
-      <p:sp>
-        <p:nvSpPr>
-          <p:cNvPr id="3" name="TextBox 2"/>
+            <a:pPr algn="ctr">
+              <a:defRPr sz="1300" b="1">
+                <a:solidFill>
+                  <a:srgbClr val="FFFFFF"/>
+                </a:solidFill>
+                <a:latin typeface="Consolas"/>
+              </a:defRPr>
+            </a:pPr>
+            <a:r>
+              <a:t>HANDS-ON EXERCISE</a:t>
+            </a:r>
+          </a:p>
+        </p:txBody>
+      </p:sp>
+      <p:sp>
+        <p:nvSpPr>
+          <p:cNvPr id="4" name="TextBox 3"/>
           <p:cNvSpPr txBox="1"/>
           <p:nvPr/>
         </p:nvSpPr>
         <p:spPr>
           <a:xfrm>
-            <a:off x="731520" y="365760"/>
-            <a:ext cx="10515600" cy="822960"/>
+            <a:off x="3017520" y="274320"/>
+            <a:ext cx="8229600" cy="548640"/>
           </a:xfrm>
           <a:prstGeom prst="rect">
             <a:avLst/>
@@ -3626,233 +3678,36 @@
           </a:bodyPr>
           <a:lstStyle/>
           <a:p>
-            <a:pPr>
-              <a:defRPr sz="3200" b="1">
-                <a:solidFill>
-                  <a:srgbClr val="222222"/>
-                </a:solidFill>
-                <a:latin typeface="Calibri"/>
-              </a:defRPr>
-            </a:pPr>
-            <a:r>
-              <a:t>Design Type Selection Guide</a:t>
-            </a:r>
-          </a:p>
-        </p:txBody>
-      </p:sp>
-      <p:sp>
-        <p:nvSpPr>
-          <p:cNvPr id="4" name="TextBox 3"/>
-          <p:cNvSpPr txBox="1"/>
-          <p:nvPr/>
-        </p:nvSpPr>
-        <p:spPr>
-          <a:xfrm>
-            <a:off x="914400" y="1463040"/>
-            <a:ext cx="10058400" cy="4754880"/>
-          </a:xfrm>
-          <a:prstGeom prst="rect">
-            <a:avLst/>
-          </a:prstGeom>
-          <a:noFill/>
-        </p:spPr>
-        <p:txBody>
-          <a:bodyPr wrap="square">
-            <a:spAutoFit/>
-          </a:bodyPr>
-          <a:lstStyle/>
-          <a:p>
-            <a:pPr>
-              <a:spcAft>
-                <a:spcPts val="800"/>
-              </a:spcAft>
-              <a:defRPr sz="2200" b="0">
-                <a:solidFill>
-                  <a:srgbClr val="222222"/>
-                </a:solidFill>
-                <a:latin typeface="Calibri"/>
-              </a:defRPr>
-            </a:pPr>
-            <a:r>
-              <a:t>2-3 factors, need optimum -&gt; CCD or Box-Behnken</a:t>
-            </a:r>
-          </a:p>
-          <a:p>
-            <a:pPr>
-              <a:spcAft>
-                <a:spcPts val="800"/>
-              </a:spcAft>
-              <a:defRPr sz="2200" b="0">
-                <a:solidFill>
-                  <a:srgbClr val="222222"/>
-                </a:solidFill>
-                <a:latin typeface="Calibri"/>
-              </a:defRPr>
-            </a:pPr>
-            <a:r>
-              <a:t>3-4 factors, avoid extremes -&gt; Box-Behnken</a:t>
-            </a:r>
-          </a:p>
-          <a:p>
-            <a:pPr>
-              <a:spcAft>
-                <a:spcPts val="800"/>
-              </a:spcAft>
-              <a:defRPr sz="2200" b="0">
-                <a:solidFill>
-                  <a:srgbClr val="222222"/>
-                </a:solidFill>
-                <a:latin typeface="Calibri"/>
-              </a:defRPr>
-            </a:pPr>
-            <a:r>
-              <a:t>Unknown model, computer sim -&gt; Latin Hypercube</a:t>
-            </a:r>
-          </a:p>
-          <a:p>
-            <a:pPr>
-              <a:spcAft>
-                <a:spcPts val="800"/>
-              </a:spcAft>
-              <a:defRPr sz="2200" b="0">
-                <a:solidFill>
-                  <a:srgbClr val="222222"/>
-                </a:solidFill>
-                <a:latin typeface="Calibri"/>
-              </a:defRPr>
-            </a:pPr>
-            <a:r>
-              <a:t>Augmenting a factorial -&gt; add star points (doe augment)</a:t>
-            </a:r>
-          </a:p>
-          <a:p>
-            <a:pPr>
-              <a:spcAft>
-                <a:spcPts val="800"/>
-              </a:spcAft>
-              <a:defRPr sz="2200" b="0">
-                <a:solidFill>
-                  <a:srgbClr val="222222"/>
-                </a:solidFill>
-                <a:latin typeface="Calibri"/>
-              </a:defRPr>
-            </a:pPr>
-            <a:r>
-              <a:t>Mixture problems -&gt; Simplex-Lattice or Simplex-Centroid</a:t>
-            </a:r>
-          </a:p>
-          <a:p>
-            <a:pPr>
-              <a:spcAft>
-                <a:spcPts val="800"/>
-              </a:spcAft>
-              <a:defRPr sz="2200" b="0">
-                <a:solidFill>
-                  <a:srgbClr val="222222"/>
-                </a:solidFill>
-                <a:latin typeface="Calibri"/>
-              </a:defRPr>
-            </a:pPr>
-            <a:r>
-              <a:t>Constrained factor space -&gt; D-Optimal</a:t>
-            </a:r>
-          </a:p>
-          <a:p>
-            <a:pPr>
-              <a:spcAft>
-                <a:spcPts val="800"/>
-              </a:spcAft>
-              <a:defRPr sz="2200" b="0">
-                <a:solidFill>
-                  <a:srgbClr val="222222"/>
-                </a:solidFill>
-                <a:latin typeface="Calibri"/>
-              </a:defRPr>
-            </a:pPr>
-            <a:r>
-              <a:t>doe-helper supports all 11 design types</a:t>
-            </a:r>
-          </a:p>
-        </p:txBody>
-      </p:sp>
-    </p:spTree>
-  </p:cSld>
-  <p:clrMapOvr>
-    <a:masterClrMapping/>
-  </p:clrMapOvr>
-</p:sld>
-</file>
-
-<file path=ppt/slides/slide12.xml><?xml version="1.0" encoding="utf-8"?>
-<p:sld xmlns:a="http://schemas.openxmlformats.org/drawingml/2006/main" xmlns:p="http://schemas.openxmlformats.org/presentationml/2006/main" xmlns:r="http://schemas.openxmlformats.org/officeDocument/2006/relationships">
-  <p:cSld>
-    <p:bg>
-      <p:bgPr>
-        <a:solidFill>
-          <a:srgbClr val="1A1A2E"/>
-        </a:solidFill>
-        <a:effectLst/>
-      </p:bgPr>
-    </p:bg>
-    <p:spTree>
-      <p:nvGrpSpPr>
-        <p:cNvPr id="1" name=""/>
-        <p:cNvGrpSpPr/>
-        <p:nvPr/>
-      </p:nvGrpSpPr>
-      <p:grpSpPr/>
-      <p:sp>
-        <p:nvSpPr>
-          <p:cNvPr id="2" name="TextBox 1"/>
-          <p:cNvSpPr txBox="1"/>
-          <p:nvPr/>
-        </p:nvSpPr>
-        <p:spPr>
-          <a:xfrm>
-            <a:off x="731520" y="457200"/>
-            <a:ext cx="10515600" cy="914400"/>
-          </a:xfrm>
-          <a:prstGeom prst="rect">
-            <a:avLst/>
-          </a:prstGeom>
-          <a:noFill/>
-        </p:spPr>
-        <p:txBody>
-          <a:bodyPr wrap="none">
-            <a:spAutoFit/>
-          </a:bodyPr>
-          <a:lstStyle/>
-          <a:p>
-            <a:pPr>
-              <a:defRPr sz="3400" b="1">
-                <a:solidFill>
-                  <a:srgbClr val="FFFFFF"/>
-                </a:solidFill>
-                <a:latin typeface="Calibri"/>
-              </a:defRPr>
-            </a:pPr>
-            <a:r>
-              <a:t>Key Takeaways</a:t>
-            </a:r>
-          </a:p>
-        </p:txBody>
-      </p:sp>
-      <p:sp>
-        <p:nvSpPr>
-          <p:cNvPr id="3" name="Rounded Rectangle 2"/>
+            <a:pPr algn="l">
+              <a:defRPr sz="2600" b="1">
+                <a:solidFill>
+                  <a:srgbClr val="111111"/>
+                </a:solidFill>
+                <a:latin typeface="Inter"/>
+              </a:defRPr>
+            </a:pPr>
+            <a:r>
+              <a:t>Exercise 5: Response Surface Optimisation</a:t>
+            </a:r>
+          </a:p>
+        </p:txBody>
+      </p:sp>
+      <p:sp>
+        <p:nvSpPr>
+          <p:cNvPr id="5" name="Rounded Rectangle 4"/>
           <p:cNvSpPr/>
           <p:nvPr/>
         </p:nvSpPr>
         <p:spPr>
           <a:xfrm>
-            <a:off x="731520" y="1645920"/>
-            <a:ext cx="10515600" cy="822960"/>
+            <a:off x="548640" y="1005840"/>
+            <a:ext cx="10972800" cy="5120640"/>
           </a:xfrm>
           <a:prstGeom prst="roundRect">
             <a:avLst/>
           </a:prstGeom>
           <a:solidFill>
-            <a:srgbClr val="2A2A4A"/>
+            <a:srgbClr val="FFFBEB"/>
           </a:solidFill>
           <a:ln>
             <a:noFill/>
@@ -3873,39 +3728,29 @@
           </a:fontRef>
         </p:style>
         <p:txBody>
-          <a:bodyPr rtlCol="0" anchor="ctr" lIns="274320"/>
-          <a:lstStyle/>
-          <a:p>
-            <a:pPr algn="ctr">
-              <a:defRPr sz="2200">
-                <a:solidFill>
-                  <a:srgbClr val="FFFFFF"/>
-                </a:solidFill>
-                <a:latin typeface="Calibri"/>
-              </a:defRPr>
-            </a:pPr>
-            <a:r>
-              <a:t>RSM fits quadratic models to find optima</a:t>
-            </a:r>
-          </a:p>
-        </p:txBody>
-      </p:sp>
-      <p:sp>
-        <p:nvSpPr>
-          <p:cNvPr id="4" name="Rounded Rectangle 3"/>
+          <a:bodyPr rtlCol="0" anchor="ctr"/>
+          <a:lstStyle/>
+          <a:p>
+            <a:pPr algn="ctr"/>
+          </a:p>
+        </p:txBody>
+      </p:sp>
+      <p:sp>
+        <p:nvSpPr>
+          <p:cNvPr id="6" name="Rectangle 5"/>
           <p:cNvSpPr/>
           <p:nvPr/>
         </p:nvSpPr>
         <p:spPr>
           <a:xfrm>
-            <a:off x="731520" y="2606040"/>
-            <a:ext cx="10515600" cy="822960"/>
-          </a:xfrm>
-          <a:prstGeom prst="roundRect">
+            <a:off x="548640" y="1005840"/>
+            <a:ext cx="36576" cy="5120640"/>
+          </a:xfrm>
+          <a:prstGeom prst="rect">
             <a:avLst/>
           </a:prstGeom>
           <a:solidFill>
-            <a:srgbClr val="2A2A4A"/>
+            <a:srgbClr val="D97706"/>
           </a:solidFill>
           <a:ln>
             <a:noFill/>
@@ -3926,244 +3771,6 @@
           </a:fontRef>
         </p:style>
         <p:txBody>
-          <a:bodyPr rtlCol="0" anchor="ctr" lIns="274320"/>
-          <a:lstStyle/>
-          <a:p>
-            <a:pPr algn="ctr">
-              <a:defRPr sz="2200">
-                <a:solidFill>
-                  <a:srgbClr val="FFFFFF"/>
-                </a:solidFill>
-                <a:latin typeface="Calibri"/>
-              </a:defRPr>
-            </a:pPr>
-            <a:r>
-              <a:t>CCD is the workhorse; Box-Behnken avoids extremes</a:t>
-            </a:r>
-          </a:p>
-        </p:txBody>
-      </p:sp>
-      <p:sp>
-        <p:nvSpPr>
-          <p:cNvPr id="5" name="Rounded Rectangle 4"/>
-          <p:cNvSpPr/>
-          <p:nvPr/>
-        </p:nvSpPr>
-        <p:spPr>
-          <a:xfrm>
-            <a:off x="731520" y="3566160"/>
-            <a:ext cx="10515600" cy="822960"/>
-          </a:xfrm>
-          <a:prstGeom prst="roundRect">
-            <a:avLst/>
-          </a:prstGeom>
-          <a:solidFill>
-            <a:srgbClr val="2A2A4A"/>
-          </a:solidFill>
-          <a:ln>
-            <a:noFill/>
-          </a:ln>
-        </p:spPr>
-        <p:style>
-          <a:lnRef idx="1">
-            <a:schemeClr val="accent1"/>
-          </a:lnRef>
-          <a:fillRef idx="3">
-            <a:schemeClr val="accent1"/>
-          </a:fillRef>
-          <a:effectRef idx="2">
-            <a:schemeClr val="accent1"/>
-          </a:effectRef>
-          <a:fontRef idx="minor">
-            <a:schemeClr val="lt1"/>
-          </a:fontRef>
-        </p:style>
-        <p:txBody>
-          <a:bodyPr rtlCol="0" anchor="ctr" lIns="274320"/>
-          <a:lstStyle/>
-          <a:p>
-            <a:pPr algn="ctr">
-              <a:defRPr sz="2200">
-                <a:solidFill>
-                  <a:srgbClr val="FFFFFF"/>
-                </a:solidFill>
-                <a:latin typeface="Calibri"/>
-              </a:defRPr>
-            </a:pPr>
-            <a:r>
-              <a:t>LHS for space-filling when the model is unknown</a:t>
-            </a:r>
-          </a:p>
-        </p:txBody>
-      </p:sp>
-      <p:sp>
-        <p:nvSpPr>
-          <p:cNvPr id="6" name="Rounded Rectangle 5"/>
-          <p:cNvSpPr/>
-          <p:nvPr/>
-        </p:nvSpPr>
-        <p:spPr>
-          <a:xfrm>
-            <a:off x="731520" y="4526280"/>
-            <a:ext cx="10515600" cy="822960"/>
-          </a:xfrm>
-          <a:prstGeom prst="roundRect">
-            <a:avLst/>
-          </a:prstGeom>
-          <a:solidFill>
-            <a:srgbClr val="2A2A4A"/>
-          </a:solidFill>
-          <a:ln>
-            <a:noFill/>
-          </a:ln>
-        </p:spPr>
-        <p:style>
-          <a:lnRef idx="1">
-            <a:schemeClr val="accent1"/>
-          </a:lnRef>
-          <a:fillRef idx="3">
-            <a:schemeClr val="accent1"/>
-          </a:fillRef>
-          <a:effectRef idx="2">
-            <a:schemeClr val="accent1"/>
-          </a:effectRef>
-          <a:fontRef idx="minor">
-            <a:schemeClr val="lt1"/>
-          </a:fontRef>
-        </p:style>
-        <p:txBody>
-          <a:bodyPr rtlCol="0" anchor="ctr" lIns="274320"/>
-          <a:lstStyle/>
-          <a:p>
-            <a:pPr algn="ctr">
-              <a:defRPr sz="2200">
-                <a:solidFill>
-                  <a:srgbClr val="FFFFFF"/>
-                </a:solidFill>
-                <a:latin typeface="Calibri"/>
-              </a:defRPr>
-            </a:pPr>
-            <a:r>
-              <a:t>doe optimize uses L-BFGS-B with multi-start</a:t>
-            </a:r>
-          </a:p>
-        </p:txBody>
-      </p:sp>
-      <p:sp>
-        <p:nvSpPr>
-          <p:cNvPr id="7" name="Rounded Rectangle 6"/>
-          <p:cNvSpPr/>
-          <p:nvPr/>
-        </p:nvSpPr>
-        <p:spPr>
-          <a:xfrm>
-            <a:off x="731520" y="5486400"/>
-            <a:ext cx="10515600" cy="822960"/>
-          </a:xfrm>
-          <a:prstGeom prst="roundRect">
-            <a:avLst/>
-          </a:prstGeom>
-          <a:solidFill>
-            <a:srgbClr val="2A2A4A"/>
-          </a:solidFill>
-          <a:ln>
-            <a:noFill/>
-          </a:ln>
-        </p:spPr>
-        <p:style>
-          <a:lnRef idx="1">
-            <a:schemeClr val="accent1"/>
-          </a:lnRef>
-          <a:fillRef idx="3">
-            <a:schemeClr val="accent1"/>
-          </a:fillRef>
-          <a:effectRef idx="2">
-            <a:schemeClr val="accent1"/>
-          </a:effectRef>
-          <a:fontRef idx="minor">
-            <a:schemeClr val="lt1"/>
-          </a:fontRef>
-        </p:style>
-        <p:txBody>
-          <a:bodyPr rtlCol="0" anchor="ctr" lIns="274320"/>
-          <a:lstStyle/>
-          <a:p>
-            <a:pPr algn="ctr">
-              <a:defRPr sz="2200">
-                <a:solidFill>
-                  <a:srgbClr val="FFFFFF"/>
-                </a:solidFill>
-                <a:latin typeface="Calibri"/>
-              </a:defRPr>
-            </a:pPr>
-            <a:r>
-              <a:t>Use steepest ascent when far from the optimum</a:t>
-            </a:r>
-          </a:p>
-        </p:txBody>
-      </p:sp>
-    </p:spTree>
-  </p:cSld>
-  <p:clrMapOvr>
-    <a:masterClrMapping/>
-  </p:clrMapOvr>
-</p:sld>
-</file>
-
-<file path=ppt/slides/slide13.xml><?xml version="1.0" encoding="utf-8"?>
-<p:sld xmlns:a="http://schemas.openxmlformats.org/drawingml/2006/main" xmlns:p="http://schemas.openxmlformats.org/presentationml/2006/main" xmlns:r="http://schemas.openxmlformats.org/officeDocument/2006/relationships">
-  <p:cSld>
-    <p:bg>
-      <p:bgPr>
-        <a:solidFill>
-          <a:srgbClr val="FFFFFF"/>
-        </a:solidFill>
-        <a:effectLst/>
-      </p:bgPr>
-    </p:bg>
-    <p:spTree>
-      <p:nvGrpSpPr>
-        <p:cNvPr id="1" name=""/>
-        <p:cNvGrpSpPr/>
-        <p:nvPr/>
-      </p:nvGrpSpPr>
-      <p:grpSpPr/>
-      <p:sp>
-        <p:nvSpPr>
-          <p:cNvPr id="2" name="Rectangle 1"/>
-          <p:cNvSpPr/>
-          <p:nvPr/>
-        </p:nvSpPr>
-        <p:spPr>
-          <a:xfrm>
-            <a:off x="0" y="0"/>
-            <a:ext cx="12191695" cy="54864"/>
-          </a:xfrm>
-          <a:prstGeom prst="rect">
-            <a:avLst/>
-          </a:prstGeom>
-          <a:solidFill>
-            <a:srgbClr val="FF8C00"/>
-          </a:solidFill>
-          <a:ln>
-            <a:noFill/>
-          </a:ln>
-        </p:spPr>
-        <p:style>
-          <a:lnRef idx="1">
-            <a:schemeClr val="accent1"/>
-          </a:lnRef>
-          <a:fillRef idx="3">
-            <a:schemeClr val="accent1"/>
-          </a:fillRef>
-          <a:effectRef idx="2">
-            <a:schemeClr val="accent1"/>
-          </a:effectRef>
-          <a:fontRef idx="minor">
-            <a:schemeClr val="lt1"/>
-          </a:fontRef>
-        </p:style>
-        <p:txBody>
           <a:bodyPr rtlCol="0" anchor="ctr"/>
           <a:lstStyle/>
           <a:p>
@@ -4173,103 +3780,14 @@
       </p:sp>
       <p:sp>
         <p:nvSpPr>
-          <p:cNvPr id="3" name="Rounded Rectangle 2"/>
-          <p:cNvSpPr/>
-          <p:nvPr/>
-        </p:nvSpPr>
-        <p:spPr>
-          <a:xfrm>
-            <a:off x="731520" y="320040"/>
-            <a:ext cx="2011680" cy="502920"/>
-          </a:xfrm>
-          <a:prstGeom prst="roundRect">
-            <a:avLst/>
-          </a:prstGeom>
-          <a:solidFill>
-            <a:srgbClr val="FF8C00"/>
-          </a:solidFill>
-          <a:ln>
-            <a:noFill/>
-          </a:ln>
-        </p:spPr>
-        <p:style>
-          <a:lnRef idx="1">
-            <a:schemeClr val="accent1"/>
-          </a:lnRef>
-          <a:fillRef idx="3">
-            <a:schemeClr val="accent1"/>
-          </a:fillRef>
-          <a:effectRef idx="2">
-            <a:schemeClr val="accent1"/>
-          </a:effectRef>
-          <a:fontRef idx="minor">
-            <a:schemeClr val="lt1"/>
-          </a:fontRef>
-        </p:style>
-        <p:txBody>
-          <a:bodyPr rtlCol="0" anchor="ctr"/>
-          <a:lstStyle/>
-          <a:p>
-            <a:pPr algn="ctr">
-              <a:defRPr sz="1400" b="1">
-                <a:solidFill>
-                  <a:srgbClr val="FFFFFF"/>
-                </a:solidFill>
-                <a:latin typeface="Calibri"/>
-              </a:defRPr>
-            </a:pPr>
-            <a:r>
-              <a:t>HANDS-ON EXERCISE</a:t>
-            </a:r>
-          </a:p>
-        </p:txBody>
-      </p:sp>
-      <p:sp>
-        <p:nvSpPr>
-          <p:cNvPr id="4" name="TextBox 3"/>
+          <p:cNvPr id="7" name="TextBox 6"/>
           <p:cNvSpPr txBox="1"/>
           <p:nvPr/>
         </p:nvSpPr>
         <p:spPr>
           <a:xfrm>
-            <a:off x="3017520" y="320040"/>
-            <a:ext cx="8229600" cy="731520"/>
-          </a:xfrm>
-          <a:prstGeom prst="rect">
-            <a:avLst/>
-          </a:prstGeom>
-          <a:noFill/>
-        </p:spPr>
-        <p:txBody>
-          <a:bodyPr wrap="none">
-            <a:spAutoFit/>
-          </a:bodyPr>
-          <a:lstStyle/>
-          <a:p>
-            <a:pPr>
-              <a:defRPr sz="3000" b="1">
-                <a:solidFill>
-                  <a:srgbClr val="222222"/>
-                </a:solidFill>
-                <a:latin typeface="Calibri"/>
-              </a:defRPr>
-            </a:pPr>
-            <a:r>
-              <a:t>Exercise 5: Response Surface Optimisation</a:t>
-            </a:r>
-          </a:p>
-        </p:txBody>
-      </p:sp>
-      <p:sp>
-        <p:nvSpPr>
-          <p:cNvPr id="5" name="TextBox 4"/>
-          <p:cNvSpPr txBox="1"/>
-          <p:nvPr/>
-        </p:nvSpPr>
-        <p:spPr>
-          <a:xfrm>
-            <a:off x="914400" y="1371600"/>
-            <a:ext cx="10058400" cy="5029200"/>
+            <a:off x="822960" y="1143000"/>
+            <a:ext cx="10424160" cy="4846320"/>
           </a:xfrm>
           <a:prstGeom prst="rect">
             <a:avLst/>
@@ -4284,177 +3802,197 @@
           <a:p>
             <a:pPr>
               <a:spcAft>
-                <a:spcPts val="600"/>
-              </a:spcAft>
-              <a:defRPr sz="2000">
-                <a:solidFill>
-                  <a:srgbClr val="222222"/>
-                </a:solidFill>
-                <a:latin typeface="Calibri"/>
-              </a:defRPr>
-            </a:pPr>
-            <a:r>
-              <a:t>1. Start from the reactor_optimization use case:</a:t>
+                <a:spcPts val="500"/>
+              </a:spcAft>
+              <a:defRPr sz="1700">
+                <a:solidFill>
+                  <a:srgbClr val="333333"/>
+                </a:solidFill>
+                <a:latin typeface="Inter"/>
+              </a:defRPr>
+            </a:pPr>
+            <a:r>
+              <a:t>1. Create a reactor experiment with 3 factors, type "ccd"</a:t>
+            </a:r>
+          </a:p>
+          <a:p>
+            <a:pPr>
+              <a:spcAft>
+                <a:spcPts val="500"/>
+              </a:spcAft>
+              <a:defRPr sz="1700">
+                <a:solidFill>
+                  <a:srgbClr val="333333"/>
+                </a:solidFill>
+                <a:latin typeface="Inter"/>
+              </a:defRPr>
+            </a:pPr>
+            <a:r>
+              <a:t>2. Run:  doe generate reactor_rsm/</a:t>
             </a:r>
           </a:p>
           <a:p>
             <a:pPr lvl="1">
               <a:spcAft>
-                <a:spcPts val="600"/>
-              </a:spcAft>
-              <a:defRPr sz="1800">
-                <a:solidFill>
-                  <a:srgbClr val="222222"/>
-                </a:solidFill>
-                <a:latin typeface="Calibri"/>
-              </a:defRPr>
-            </a:pPr>
-            <a:r>
-              <a:t>doe init reactor_optimization --design ccd</a:t>
+                <a:spcPts val="500"/>
+              </a:spcAft>
+              <a:defRPr sz="1500">
+                <a:solidFill>
+                  <a:srgbClr val="666666"/>
+                </a:solidFill>
+                <a:latin typeface="Inter"/>
+              </a:defRPr>
+            </a:pPr>
+            <a:r>
+              <a:t>How many runs? What's the structure?</a:t>
             </a:r>
           </a:p>
           <a:p>
             <a:pPr>
               <a:spcAft>
-                <a:spcPts val="600"/>
-              </a:spcAft>
-              <a:defRPr sz="2000">
-                <a:solidFill>
-                  <a:srgbClr val="222222"/>
-                </a:solidFill>
-                <a:latin typeface="Calibri"/>
-              </a:defRPr>
-            </a:pPr>
-            <a:r>
-              <a:t>2. Run: doe generate reactor_optimization/</a:t>
+                <a:spcPts val="500"/>
+              </a:spcAft>
+              <a:defRPr sz="1700">
+                <a:solidFill>
+                  <a:srgbClr val="333333"/>
+                </a:solidFill>
+                <a:latin typeface="Inter"/>
+              </a:defRPr>
+            </a:pPr>
+            <a:r>
+              <a:t>3. Run the simulation:  bash reactor_rsm/run.sh</a:t>
             </a:r>
           </a:p>
           <a:p>
             <a:pPr>
               <a:spcAft>
-                <a:spcPts val="600"/>
-              </a:spcAft>
-              <a:defRPr sz="2000">
-                <a:solidFill>
-                  <a:srgbClr val="222222"/>
-                </a:solidFill>
-                <a:latin typeface="Calibri"/>
-              </a:defRPr>
-            </a:pPr>
-            <a:r>
-              <a:t>3. Examine the design matrix: how many runs? What's the structure?</a:t>
+                <a:spcPts val="500"/>
+              </a:spcAft>
+              <a:defRPr sz="1700">
+                <a:solidFill>
+                  <a:srgbClr val="333333"/>
+                </a:solidFill>
+                <a:latin typeface="Inter"/>
+              </a:defRPr>
+            </a:pPr>
+            <a:r>
+              <a:t>4. Run:  doe analyze reactor_rsm/</a:t>
+            </a:r>
+          </a:p>
+          <a:p>
+            <a:pPr lvl="1">
+              <a:spcAft>
+                <a:spcPts val="500"/>
+              </a:spcAft>
+              <a:defRPr sz="1500">
+                <a:solidFill>
+                  <a:srgbClr val="666666"/>
+                </a:solidFill>
+                <a:latin typeface="Inter"/>
+              </a:defRPr>
+            </a:pPr>
+            <a:r>
+              <a:t>Look at the response surface plots</a:t>
             </a:r>
           </a:p>
           <a:p>
             <a:pPr>
               <a:spcAft>
-                <a:spcPts val="600"/>
-              </a:spcAft>
-              <a:defRPr sz="2000">
-                <a:solidFill>
-                  <a:srgbClr val="222222"/>
-                </a:solidFill>
-                <a:latin typeface="Calibri"/>
-              </a:defRPr>
-            </a:pPr>
-            <a:r>
-              <a:t>4. Run the simulation: bash reactor_optimization/run.sh</a:t>
+                <a:spcPts val="500"/>
+              </a:spcAft>
+              <a:defRPr sz="1700">
+                <a:solidFill>
+                  <a:srgbClr val="333333"/>
+                </a:solidFill>
+                <a:latin typeface="Inter"/>
+              </a:defRPr>
+            </a:pPr>
+            <a:r>
+              <a:t>5. Run:  doe optimize reactor_rsm/</a:t>
+            </a:r>
+          </a:p>
+          <a:p>
+            <a:pPr lvl="1">
+              <a:spcAft>
+                <a:spcPts val="500"/>
+              </a:spcAft>
+              <a:defRPr sz="1500">
+                <a:solidFill>
+                  <a:srgbClr val="666666"/>
+                </a:solidFill>
+                <a:latin typeface="Inter"/>
+              </a:defRPr>
+            </a:pPr>
+            <a:r>
+              <a:t>What are the recommended optimal settings?</a:t>
             </a:r>
           </a:p>
           <a:p>
             <a:pPr>
               <a:spcAft>
-                <a:spcPts val="600"/>
-              </a:spcAft>
-              <a:defRPr sz="2000">
-                <a:solidFill>
-                  <a:srgbClr val="222222"/>
-                </a:solidFill>
-                <a:latin typeface="Calibri"/>
-              </a:defRPr>
-            </a:pPr>
-            <a:r>
-              <a:t>5. Run: doe analyze reactor_optimization/</a:t>
+                <a:spcPts val="500"/>
+              </a:spcAft>
+              <a:defRPr sz="1700">
+                <a:solidFill>
+                  <a:srgbClr val="333333"/>
+                </a:solidFill>
+                <a:latin typeface="Inter"/>
+              </a:defRPr>
+            </a:pPr>
+            <a:r>
+              <a:t>6. Try Box-Behnken: change type, repeat</a:t>
             </a:r>
           </a:p>
           <a:p>
             <a:pPr lvl="1">
               <a:spcAft>
-                <a:spcPts val="600"/>
-              </a:spcAft>
-              <a:defRPr sz="1800">
-                <a:solidFill>
-                  <a:srgbClr val="222222"/>
-                </a:solidFill>
-                <a:latin typeface="Calibri"/>
-              </a:defRPr>
-            </a:pPr>
-            <a:r>
-              <a:t>Look at the response surface plots</a:t>
-            </a:r>
-          </a:p>
-          <a:p>
-            <a:pPr>
-              <a:spcAft>
-                <a:spcPts val="600"/>
-              </a:spcAft>
-              <a:defRPr sz="2000">
-                <a:solidFill>
-                  <a:srgbClr val="222222"/>
-                </a:solidFill>
-                <a:latin typeface="Calibri"/>
-              </a:defRPr>
-            </a:pPr>
-            <a:r>
-              <a:t>6. Run: doe optimize reactor_optimization/</a:t>
-            </a:r>
-          </a:p>
-          <a:p>
-            <a:pPr lvl="1">
-              <a:spcAft>
-                <a:spcPts val="600"/>
-              </a:spcAft>
-              <a:defRPr sz="1800">
-                <a:solidFill>
-                  <a:srgbClr val="222222"/>
-                </a:solidFill>
-                <a:latin typeface="Calibri"/>
-              </a:defRPr>
-            </a:pPr>
-            <a:r>
-              <a:t>What are the recommended optimal settings?</a:t>
-            </a:r>
-          </a:p>
-          <a:p>
-            <a:pPr>
-              <a:spcAft>
-                <a:spcPts val="600"/>
-              </a:spcAft>
-              <a:defRPr sz="2000">
-                <a:solidFill>
-                  <a:srgbClr val="222222"/>
-                </a:solidFill>
-                <a:latin typeface="Calibri"/>
-              </a:defRPr>
-            </a:pPr>
-            <a:r>
-              <a:t>7. Now try Box-Behnken: change type to "box_behnken" and repeat</a:t>
-            </a:r>
-          </a:p>
-          <a:p>
-            <a:pPr lvl="1">
-              <a:spcAft>
-                <a:spcPts val="600"/>
-              </a:spcAft>
-              <a:defRPr sz="1800">
-                <a:solidFill>
-                  <a:srgbClr val="222222"/>
-                </a:solidFill>
-                <a:latin typeface="Calibri"/>
-              </a:defRPr>
-            </a:pPr>
-            <a:r>
-              <a:t>Compare the run count and optimal settings</a:t>
+                <a:spcPts val="500"/>
+              </a:spcAft>
+              <a:defRPr sz="1500">
+                <a:solidFill>
+                  <a:srgbClr val="666666"/>
+                </a:solidFill>
+                <a:latin typeface="Inter"/>
+              </a:defRPr>
+            </a:pPr>
+            <a:r>
+              <a:t>Compare run count and optimal settings</a:t>
+            </a:r>
+          </a:p>
+        </p:txBody>
+      </p:sp>
+      <p:sp>
+        <p:nvSpPr>
+          <p:cNvPr id="8" name="TextBox 7"/>
+          <p:cNvSpPr txBox="1"/>
+          <p:nvPr/>
+        </p:nvSpPr>
+        <p:spPr>
+          <a:xfrm>
+            <a:off x="731520" y="6400800"/>
+            <a:ext cx="10058400" cy="365760"/>
+          </a:xfrm>
+          <a:prstGeom prst="rect">
+            <a:avLst/>
+          </a:prstGeom>
+          <a:noFill/>
+        </p:spPr>
+        <p:txBody>
+          <a:bodyPr wrap="square">
+            <a:spAutoFit/>
+          </a:bodyPr>
+          <a:lstStyle/>
+          <a:p>
+            <a:pPr algn="l">
+              <a:defRPr sz="1000" b="0">
+                <a:solidFill>
+                  <a:srgbClr val="999999"/>
+                </a:solidFill>
+                <a:latin typeface="Consolas"/>
+              </a:defRPr>
+            </a:pPr>
+            <a:r>
+              <a:t>© 2026 Martin J. Gallagher  |  GPL-3.0-or-later  |  doehelper.com</a:t>
             </a:r>
           </a:p>
         </p:txBody>
@@ -4473,7 +4011,7 @@
     <p:bg>
       <p:bgPr>
         <a:solidFill>
-          <a:srgbClr val="FFFFFF"/>
+          <a:srgbClr val="FAFAFA"/>
         </a:solidFill>
         <a:effectLst/>
       </p:bgPr>
@@ -4494,13 +4032,13 @@
         <p:spPr>
           <a:xfrm>
             <a:off x="0" y="0"/>
-            <a:ext cx="12191695" cy="54864"/>
+            <a:ext cx="12191695" cy="45720"/>
           </a:xfrm>
           <a:prstGeom prst="rect">
             <a:avLst/>
           </a:prstGeom>
           <a:solidFill>
-            <a:srgbClr val="007BFF"/>
+            <a:srgbClr val="5046E5"/>
           </a:solidFill>
           <a:ln>
             <a:noFill/>
@@ -4530,14 +4068,57 @@
       </p:sp>
       <p:sp>
         <p:nvSpPr>
-          <p:cNvPr id="3" name="TextBox 2"/>
+          <p:cNvPr id="3" name="Rectangle 2"/>
+          <p:cNvSpPr/>
+          <p:nvPr/>
+        </p:nvSpPr>
+        <p:spPr>
+          <a:xfrm>
+            <a:off x="548640" y="411480"/>
+            <a:ext cx="36576" cy="502920"/>
+          </a:xfrm>
+          <a:prstGeom prst="rect">
+            <a:avLst/>
+          </a:prstGeom>
+          <a:solidFill>
+            <a:srgbClr val="5046E5"/>
+          </a:solidFill>
+          <a:ln>
+            <a:noFill/>
+          </a:ln>
+        </p:spPr>
+        <p:style>
+          <a:lnRef idx="1">
+            <a:schemeClr val="accent1"/>
+          </a:lnRef>
+          <a:fillRef idx="3">
+            <a:schemeClr val="accent1"/>
+          </a:fillRef>
+          <a:effectRef idx="2">
+            <a:schemeClr val="accent1"/>
+          </a:effectRef>
+          <a:fontRef idx="minor">
+            <a:schemeClr val="lt1"/>
+          </a:fontRef>
+        </p:style>
+        <p:txBody>
+          <a:bodyPr rtlCol="0" anchor="ctr"/>
+          <a:lstStyle/>
+          <a:p>
+            <a:pPr algn="ctr"/>
+          </a:p>
+        </p:txBody>
+      </p:sp>
+      <p:sp>
+        <p:nvSpPr>
+          <p:cNvPr id="4" name="TextBox 3"/>
           <p:cNvSpPr txBox="1"/>
           <p:nvPr/>
         </p:nvSpPr>
         <p:spPr>
           <a:xfrm>
-            <a:off x="731520" y="365760"/>
-            <a:ext cx="10515600" cy="822960"/>
+            <a:off x="777240" y="365760"/>
+            <a:ext cx="10058400" cy="640080"/>
           </a:xfrm>
           <a:prstGeom prst="rect">
             <a:avLst/>
@@ -4550,12 +4131,12 @@
           </a:bodyPr>
           <a:lstStyle/>
           <a:p>
-            <a:pPr>
-              <a:defRPr sz="3200" b="1">
-                <a:solidFill>
-                  <a:srgbClr val="222222"/>
-                </a:solidFill>
-                <a:latin typeface="Calibri"/>
+            <a:pPr algn="l">
+              <a:defRPr sz="2800" b="1">
+                <a:solidFill>
+                  <a:srgbClr val="111111"/>
+                </a:solidFill>
+                <a:latin typeface="Inter"/>
               </a:defRPr>
             </a:pPr>
             <a:r>
@@ -4566,14 +4147,14 @@
       </p:sp>
       <p:sp>
         <p:nvSpPr>
-          <p:cNvPr id="4" name="TextBox 3"/>
+          <p:cNvPr id="5" name="TextBox 4"/>
           <p:cNvSpPr txBox="1"/>
           <p:nvPr/>
         </p:nvSpPr>
         <p:spPr>
           <a:xfrm>
-            <a:off x="914400" y="1463040"/>
-            <a:ext cx="10058400" cy="4754880"/>
+            <a:off x="822960" y="1188720"/>
+            <a:ext cx="10241280" cy="5120640"/>
           </a:xfrm>
           <a:prstGeom prst="rect">
             <a:avLst/>
@@ -4588,13 +4169,13 @@
           <a:p>
             <a:pPr>
               <a:spcAft>
-                <a:spcPts val="800"/>
-              </a:spcAft>
-              <a:defRPr sz="2200" b="0">
-                <a:solidFill>
-                  <a:srgbClr val="222222"/>
-                </a:solidFill>
-                <a:latin typeface="Calibri"/>
+                <a:spcPts val="600"/>
+              </a:spcAft>
+              <a:defRPr sz="1900">
+                <a:solidFill>
+                  <a:srgbClr val="333333"/>
+                </a:solidFill>
+                <a:latin typeface="Inter"/>
               </a:defRPr>
             </a:pPr>
             <a:r>
@@ -4604,29 +4185,29 @@
           <a:p>
             <a:pPr>
               <a:spcAft>
-                <a:spcPts val="800"/>
-              </a:spcAft>
-              <a:defRPr sz="2200" b="0">
-                <a:solidFill>
-                  <a:srgbClr val="222222"/>
-                </a:solidFill>
-                <a:latin typeface="Calibri"/>
-              </a:defRPr>
-            </a:pPr>
-            <a:r>
-              <a:t>Learn Central Composite Design (CCD) and Box-Behnken (BBD)</a:t>
+                <a:spcPts val="600"/>
+              </a:spcAft>
+              <a:defRPr sz="1900">
+                <a:solidFill>
+                  <a:srgbClr val="333333"/>
+                </a:solidFill>
+                <a:latin typeface="Inter"/>
+              </a:defRPr>
+            </a:pPr>
+            <a:r>
+              <a:t>Learn Central Composite Design (CCD) and Box-Behnken</a:t>
             </a:r>
           </a:p>
           <a:p>
             <a:pPr>
               <a:spcAft>
-                <a:spcPts val="800"/>
-              </a:spcAft>
-              <a:defRPr sz="2200" b="0">
-                <a:solidFill>
-                  <a:srgbClr val="222222"/>
-                </a:solidFill>
-                <a:latin typeface="Calibri"/>
+                <a:spcPts val="600"/>
+              </a:spcAft>
+              <a:defRPr sz="1900">
+                <a:solidFill>
+                  <a:srgbClr val="333333"/>
+                </a:solidFill>
+                <a:latin typeface="Inter"/>
               </a:defRPr>
             </a:pPr>
             <a:r>
@@ -4636,13 +4217,13 @@
           <a:p>
             <a:pPr>
               <a:spcAft>
-                <a:spcPts val="800"/>
-              </a:spcAft>
-              <a:defRPr sz="2200" b="0">
-                <a:solidFill>
-                  <a:srgbClr val="222222"/>
-                </a:solidFill>
-                <a:latin typeface="Calibri"/>
+                <a:spcPts val="600"/>
+              </a:spcAft>
+              <a:defRPr sz="1900">
+                <a:solidFill>
+                  <a:srgbClr val="333333"/>
+                </a:solidFill>
+                <a:latin typeface="Inter"/>
               </a:defRPr>
             </a:pPr>
             <a:r>
@@ -4652,13 +4233,13 @@
           <a:p>
             <a:pPr>
               <a:spcAft>
-                <a:spcPts val="800"/>
-              </a:spcAft>
-              <a:defRPr sz="2200" b="0">
-                <a:solidFill>
-                  <a:srgbClr val="222222"/>
-                </a:solidFill>
-                <a:latin typeface="Calibri"/>
+                <a:spcPts val="600"/>
+              </a:spcAft>
+              <a:defRPr sz="1900">
+                <a:solidFill>
+                  <a:srgbClr val="333333"/>
+                </a:solidFill>
+                <a:latin typeface="Inter"/>
               </a:defRPr>
             </a:pPr>
             <a:r>
@@ -4668,17 +4249,53 @@
           <a:p>
             <a:pPr>
               <a:spcAft>
-                <a:spcPts val="800"/>
-              </a:spcAft>
-              <a:defRPr sz="2200" b="0">
-                <a:solidFill>
-                  <a:srgbClr val="222222"/>
-                </a:solidFill>
-                <a:latin typeface="Calibri"/>
+                <a:spcPts val="600"/>
+              </a:spcAft>
+              <a:defRPr sz="1900">
+                <a:solidFill>
+                  <a:srgbClr val="333333"/>
+                </a:solidFill>
+                <a:latin typeface="Inter"/>
               </a:defRPr>
             </a:pPr>
             <a:r>
               <a:t>Use doe optimize to find optimal factor settings</a:t>
+            </a:r>
+          </a:p>
+        </p:txBody>
+      </p:sp>
+      <p:sp>
+        <p:nvSpPr>
+          <p:cNvPr id="6" name="TextBox 5"/>
+          <p:cNvSpPr txBox="1"/>
+          <p:nvPr/>
+        </p:nvSpPr>
+        <p:spPr>
+          <a:xfrm>
+            <a:off x="731520" y="6400800"/>
+            <a:ext cx="10058400" cy="365760"/>
+          </a:xfrm>
+          <a:prstGeom prst="rect">
+            <a:avLst/>
+          </a:prstGeom>
+          <a:noFill/>
+        </p:spPr>
+        <p:txBody>
+          <a:bodyPr wrap="square">
+            <a:spAutoFit/>
+          </a:bodyPr>
+          <a:lstStyle/>
+          <a:p>
+            <a:pPr algn="l">
+              <a:defRPr sz="1000" b="0">
+                <a:solidFill>
+                  <a:srgbClr val="999999"/>
+                </a:solidFill>
+                <a:latin typeface="Consolas"/>
+              </a:defRPr>
+            </a:pPr>
+            <a:r>
+              <a:t>© 2026 Martin J. Gallagher  |  GPL-3.0-or-later  |  doehelper.com</a:t>
             </a:r>
           </a:p>
         </p:txBody>
@@ -4697,7 +4314,7 @@
     <p:bg>
       <p:bgPr>
         <a:solidFill>
-          <a:srgbClr val="FFFFFF"/>
+          <a:srgbClr val="FAFAFA"/>
         </a:solidFill>
         <a:effectLst/>
       </p:bgPr>
@@ -4718,13 +4335,13 @@
         <p:spPr>
           <a:xfrm>
             <a:off x="0" y="0"/>
-            <a:ext cx="12191695" cy="54864"/>
+            <a:ext cx="12191695" cy="45720"/>
           </a:xfrm>
           <a:prstGeom prst="rect">
             <a:avLst/>
           </a:prstGeom>
           <a:solidFill>
-            <a:srgbClr val="007BFF"/>
+            <a:srgbClr val="5046E5"/>
           </a:solidFill>
           <a:ln>
             <a:noFill/>
@@ -4754,14 +4371,57 @@
       </p:sp>
       <p:sp>
         <p:nvSpPr>
-          <p:cNvPr id="3" name="TextBox 2"/>
+          <p:cNvPr id="3" name="Rectangle 2"/>
+          <p:cNvSpPr/>
+          <p:nvPr/>
+        </p:nvSpPr>
+        <p:spPr>
+          <a:xfrm>
+            <a:off x="548640" y="411480"/>
+            <a:ext cx="36576" cy="502920"/>
+          </a:xfrm>
+          <a:prstGeom prst="rect">
+            <a:avLst/>
+          </a:prstGeom>
+          <a:solidFill>
+            <a:srgbClr val="5046E5"/>
+          </a:solidFill>
+          <a:ln>
+            <a:noFill/>
+          </a:ln>
+        </p:spPr>
+        <p:style>
+          <a:lnRef idx="1">
+            <a:schemeClr val="accent1"/>
+          </a:lnRef>
+          <a:fillRef idx="3">
+            <a:schemeClr val="accent1"/>
+          </a:fillRef>
+          <a:effectRef idx="2">
+            <a:schemeClr val="accent1"/>
+          </a:effectRef>
+          <a:fontRef idx="minor">
+            <a:schemeClr val="lt1"/>
+          </a:fontRef>
+        </p:style>
+        <p:txBody>
+          <a:bodyPr rtlCol="0" anchor="ctr"/>
+          <a:lstStyle/>
+          <a:p>
+            <a:pPr algn="ctr"/>
+          </a:p>
+        </p:txBody>
+      </p:sp>
+      <p:sp>
+        <p:nvSpPr>
+          <p:cNvPr id="4" name="TextBox 3"/>
           <p:cNvSpPr txBox="1"/>
           <p:nvPr/>
         </p:nvSpPr>
         <p:spPr>
           <a:xfrm>
-            <a:off x="731520" y="365760"/>
-            <a:ext cx="10515600" cy="822960"/>
+            <a:off x="777240" y="365760"/>
+            <a:ext cx="10058400" cy="640080"/>
           </a:xfrm>
           <a:prstGeom prst="rect">
             <a:avLst/>
@@ -4774,12 +4434,12 @@
           </a:bodyPr>
           <a:lstStyle/>
           <a:p>
-            <a:pPr>
-              <a:defRPr sz="3200" b="1">
-                <a:solidFill>
-                  <a:srgbClr val="222222"/>
-                </a:solidFill>
-                <a:latin typeface="Calibri"/>
+            <a:pPr algn="l">
+              <a:defRPr sz="2800" b="1">
+                <a:solidFill>
+                  <a:srgbClr val="111111"/>
+                </a:solidFill>
+                <a:latin typeface="Inter"/>
               </a:defRPr>
             </a:pPr>
             <a:r>
@@ -4790,14 +4450,14 @@
       </p:sp>
       <p:sp>
         <p:nvSpPr>
-          <p:cNvPr id="4" name="TextBox 3"/>
+          <p:cNvPr id="5" name="TextBox 4"/>
           <p:cNvSpPr txBox="1"/>
           <p:nvPr/>
         </p:nvSpPr>
         <p:spPr>
           <a:xfrm>
-            <a:off x="914400" y="1463040"/>
-            <a:ext cx="10058400" cy="4754880"/>
+            <a:off x="822960" y="1188720"/>
+            <a:ext cx="10241280" cy="5120640"/>
           </a:xfrm>
           <a:prstGeom prst="rect">
             <a:avLst/>
@@ -4812,29 +4472,29 @@
           <a:p>
             <a:pPr>
               <a:spcAft>
-                <a:spcPts val="800"/>
-              </a:spcAft>
-              <a:defRPr sz="2200" b="0">
-                <a:solidFill>
-                  <a:srgbClr val="222222"/>
-                </a:solidFill>
-                <a:latin typeface="Calibri"/>
-              </a:defRPr>
-            </a:pPr>
-            <a:r>
-              <a:t>Screening identified the vital few factors (typically 2-4)</a:t>
+                <a:spcPts val="600"/>
+              </a:spcAft>
+              <a:defRPr sz="1900">
+                <a:solidFill>
+                  <a:srgbClr val="333333"/>
+                </a:solidFill>
+                <a:latin typeface="Inter"/>
+              </a:defRPr>
+            </a:pPr>
+            <a:r>
+              <a:t>Screening identified the vital few factors (typically 2–4)</a:t>
             </a:r>
           </a:p>
           <a:p>
             <a:pPr>
               <a:spcAft>
-                <a:spcPts val="800"/>
-              </a:spcAft>
-              <a:defRPr sz="2200" b="0">
-                <a:solidFill>
-                  <a:srgbClr val="222222"/>
-                </a:solidFill>
-                <a:latin typeface="Calibri"/>
+                <a:spcPts val="600"/>
+              </a:spcAft>
+              <a:defRPr sz="1900">
+                <a:solidFill>
+                  <a:srgbClr val="333333"/>
+                </a:solidFill>
+                <a:latin typeface="Inter"/>
               </a:defRPr>
             </a:pPr>
             <a:r>
@@ -4844,13 +4504,13 @@
           <a:p>
             <a:pPr>
               <a:spcAft>
-                <a:spcPts val="800"/>
-              </a:spcAft>
-              <a:defRPr sz="2200" b="0">
-                <a:solidFill>
-                  <a:srgbClr val="222222"/>
-                </a:solidFill>
-                <a:latin typeface="Calibri"/>
+                <a:spcPts val="600"/>
+              </a:spcAft>
+              <a:defRPr sz="1900">
+                <a:solidFill>
+                  <a:srgbClr val="333333"/>
+                </a:solidFill>
+                <a:latin typeface="Inter"/>
               </a:defRPr>
             </a:pPr>
             <a:r>
@@ -4860,49 +4520,85 @@
           <a:p>
             <a:pPr>
               <a:spcAft>
-                <a:spcPts val="800"/>
-              </a:spcAft>
-              <a:defRPr sz="2200" b="0">
-                <a:solidFill>
-                  <a:srgbClr val="222222"/>
-                </a:solidFill>
-                <a:latin typeface="Calibri"/>
-              </a:defRPr>
-            </a:pPr>
-            <a:r>
-              <a:t>Response Surface Methodology (RSM) fits a quadratic model:</a:t>
+                <a:spcPts val="600"/>
+              </a:spcAft>
+              <a:defRPr sz="1900">
+                <a:solidFill>
+                  <a:srgbClr val="333333"/>
+                </a:solidFill>
+                <a:latin typeface="Inter"/>
+              </a:defRPr>
+            </a:pPr>
+            <a:r>
+              <a:t>RSM fits a quadratic model:</a:t>
             </a:r>
           </a:p>
           <a:p>
             <a:pPr lvl="1">
               <a:spcAft>
-                <a:spcPts val="800"/>
+                <a:spcPts val="600"/>
+              </a:spcAft>
+              <a:defRPr sz="1700">
+                <a:solidFill>
+                  <a:srgbClr val="666666"/>
+                </a:solidFill>
+                <a:latin typeface="Inter"/>
+              </a:defRPr>
+            </a:pPr>
+            <a:r>
+              <a:t>y = b₀ + b₁x₁ + b₂x₂ + b₁₂x₁x₂ + b₁₁x₁² + b₂₂x₂²</a:t>
+            </a:r>
+          </a:p>
+          <a:p>
+            <a:pPr>
+              <a:spcAft>
+                <a:spcPts val="600"/>
               </a:spcAft>
               <a:defRPr sz="1900">
                 <a:solidFill>
-                  <a:srgbClr val="222222"/>
-                </a:solidFill>
-                <a:latin typeface="Calibri"/>
-              </a:defRPr>
-            </a:pPr>
-            <a:r>
-              <a:t>y = b0 + b1*x1 + b2*x2 + b12*x1*x2 + b11*x1^2 + b22*x2^2</a:t>
-            </a:r>
-          </a:p>
-          <a:p>
-            <a:pPr>
-              <a:spcAft>
-                <a:spcPts val="800"/>
-              </a:spcAft>
-              <a:defRPr sz="2200" b="0">
-                <a:solidFill>
-                  <a:srgbClr val="222222"/>
-                </a:solidFill>
-                <a:latin typeface="Calibri"/>
+                  <a:srgbClr val="333333"/>
+                </a:solidFill>
+                <a:latin typeface="Inter"/>
               </a:defRPr>
             </a:pPr>
             <a:r>
               <a:t>This captures curves, ridges, saddle points, and optima</a:t>
+            </a:r>
+          </a:p>
+        </p:txBody>
+      </p:sp>
+      <p:sp>
+        <p:nvSpPr>
+          <p:cNvPr id="6" name="TextBox 5"/>
+          <p:cNvSpPr txBox="1"/>
+          <p:nvPr/>
+        </p:nvSpPr>
+        <p:spPr>
+          <a:xfrm>
+            <a:off x="731520" y="6400800"/>
+            <a:ext cx="10058400" cy="365760"/>
+          </a:xfrm>
+          <a:prstGeom prst="rect">
+            <a:avLst/>
+          </a:prstGeom>
+          <a:noFill/>
+        </p:spPr>
+        <p:txBody>
+          <a:bodyPr wrap="square">
+            <a:spAutoFit/>
+          </a:bodyPr>
+          <a:lstStyle/>
+          <a:p>
+            <a:pPr algn="l">
+              <a:defRPr sz="1000" b="0">
+                <a:solidFill>
+                  <a:srgbClr val="999999"/>
+                </a:solidFill>
+                <a:latin typeface="Consolas"/>
+              </a:defRPr>
+            </a:pPr>
+            <a:r>
+              <a:t>© 2026 Martin J. Gallagher  |  GPL-3.0-or-later  |  doehelper.com</a:t>
             </a:r>
           </a:p>
         </p:txBody>
@@ -4921,7 +4617,7 @@
     <p:bg>
       <p:bgPr>
         <a:solidFill>
-          <a:srgbClr val="FFFFFF"/>
+          <a:srgbClr val="FAFAFA"/>
         </a:solidFill>
         <a:effectLst/>
       </p:bgPr>
@@ -4942,13 +4638,13 @@
         <p:spPr>
           <a:xfrm>
             <a:off x="0" y="0"/>
-            <a:ext cx="12191695" cy="54864"/>
+            <a:ext cx="12191695" cy="45720"/>
           </a:xfrm>
           <a:prstGeom prst="rect">
             <a:avLst/>
           </a:prstGeom>
           <a:solidFill>
-            <a:srgbClr val="007BFF"/>
+            <a:srgbClr val="5046E5"/>
           </a:solidFill>
           <a:ln>
             <a:noFill/>
@@ -4978,14 +4674,57 @@
       </p:sp>
       <p:sp>
         <p:nvSpPr>
-          <p:cNvPr id="3" name="TextBox 2"/>
+          <p:cNvPr id="3" name="Rectangle 2"/>
+          <p:cNvSpPr/>
+          <p:nvPr/>
+        </p:nvSpPr>
+        <p:spPr>
+          <a:xfrm>
+            <a:off x="548640" y="411480"/>
+            <a:ext cx="36576" cy="502920"/>
+          </a:xfrm>
+          <a:prstGeom prst="rect">
+            <a:avLst/>
+          </a:prstGeom>
+          <a:solidFill>
+            <a:srgbClr val="5046E5"/>
+          </a:solidFill>
+          <a:ln>
+            <a:noFill/>
+          </a:ln>
+        </p:spPr>
+        <p:style>
+          <a:lnRef idx="1">
+            <a:schemeClr val="accent1"/>
+          </a:lnRef>
+          <a:fillRef idx="3">
+            <a:schemeClr val="accent1"/>
+          </a:fillRef>
+          <a:effectRef idx="2">
+            <a:schemeClr val="accent1"/>
+          </a:effectRef>
+          <a:fontRef idx="minor">
+            <a:schemeClr val="lt1"/>
+          </a:fontRef>
+        </p:style>
+        <p:txBody>
+          <a:bodyPr rtlCol="0" anchor="ctr"/>
+          <a:lstStyle/>
+          <a:p>
+            <a:pPr algn="ctr"/>
+          </a:p>
+        </p:txBody>
+      </p:sp>
+      <p:sp>
+        <p:nvSpPr>
+          <p:cNvPr id="4" name="TextBox 3"/>
           <p:cNvSpPr txBox="1"/>
           <p:nvPr/>
         </p:nvSpPr>
         <p:spPr>
           <a:xfrm>
-            <a:off x="731520" y="365760"/>
-            <a:ext cx="10515600" cy="822960"/>
+            <a:off x="777240" y="365760"/>
+            <a:ext cx="10058400" cy="640080"/>
           </a:xfrm>
           <a:prstGeom prst="rect">
             <a:avLst/>
@@ -4998,30 +4737,116 @@
           </a:bodyPr>
           <a:lstStyle/>
           <a:p>
-            <a:pPr>
-              <a:defRPr sz="3200" b="1">
-                <a:solidFill>
-                  <a:srgbClr val="222222"/>
-                </a:solidFill>
-                <a:latin typeface="Calibri"/>
-              </a:defRPr>
-            </a:pPr>
-            <a:r>
-              <a:t>Central Composite Design (CCD)</a:t>
-            </a:r>
-          </a:p>
-        </p:txBody>
-      </p:sp>
-      <p:sp>
-        <p:nvSpPr>
-          <p:cNvPr id="4" name="TextBox 3"/>
+            <a:pPr algn="l">
+              <a:defRPr sz="2800" b="1">
+                <a:solidFill>
+                  <a:srgbClr val="111111"/>
+                </a:solidFill>
+                <a:latin typeface="Inter"/>
+              </a:defRPr>
+            </a:pPr>
+            <a:r>
+              <a:t>CCD vs. Box-Behnken</a:t>
+            </a:r>
+          </a:p>
+        </p:txBody>
+      </p:sp>
+      <p:sp>
+        <p:nvSpPr>
+          <p:cNvPr id="5" name="Rounded Rectangle 4"/>
+          <p:cNvSpPr/>
+          <p:nvPr/>
+        </p:nvSpPr>
+        <p:spPr>
+          <a:xfrm>
+            <a:off x="548640" y="1188720"/>
+            <a:ext cx="5303520" cy="4937760"/>
+          </a:xfrm>
+          <a:prstGeom prst="roundRect">
+            <a:avLst/>
+          </a:prstGeom>
+          <a:solidFill>
+            <a:srgbClr val="F0FDF4"/>
+          </a:solidFill>
+          <a:ln>
+            <a:noFill/>
+          </a:ln>
+        </p:spPr>
+        <p:style>
+          <a:lnRef idx="1">
+            <a:schemeClr val="accent1"/>
+          </a:lnRef>
+          <a:fillRef idx="3">
+            <a:schemeClr val="accent1"/>
+          </a:fillRef>
+          <a:effectRef idx="2">
+            <a:schemeClr val="accent1"/>
+          </a:effectRef>
+          <a:fontRef idx="minor">
+            <a:schemeClr val="lt1"/>
+          </a:fontRef>
+        </p:style>
+        <p:txBody>
+          <a:bodyPr rtlCol="0" anchor="ctr"/>
+          <a:lstStyle/>
+          <a:p>
+            <a:pPr algn="ctr"/>
+          </a:p>
+        </p:txBody>
+      </p:sp>
+      <p:sp>
+        <p:nvSpPr>
+          <p:cNvPr id="6" name="Rectangle 5"/>
+          <p:cNvSpPr/>
+          <p:nvPr/>
+        </p:nvSpPr>
+        <p:spPr>
+          <a:xfrm>
+            <a:off x="548640" y="1188720"/>
+            <a:ext cx="36576" cy="4937760"/>
+          </a:xfrm>
+          <a:prstGeom prst="rect">
+            <a:avLst/>
+          </a:prstGeom>
+          <a:solidFill>
+            <a:srgbClr val="16A34A"/>
+          </a:solidFill>
+          <a:ln>
+            <a:noFill/>
+          </a:ln>
+        </p:spPr>
+        <p:style>
+          <a:lnRef idx="1">
+            <a:schemeClr val="accent1"/>
+          </a:lnRef>
+          <a:fillRef idx="3">
+            <a:schemeClr val="accent1"/>
+          </a:fillRef>
+          <a:effectRef idx="2">
+            <a:schemeClr val="accent1"/>
+          </a:effectRef>
+          <a:fontRef idx="minor">
+            <a:schemeClr val="lt1"/>
+          </a:fontRef>
+        </p:style>
+        <p:txBody>
+          <a:bodyPr rtlCol="0" anchor="ctr"/>
+          <a:lstStyle/>
+          <a:p>
+            <a:pPr algn="ctr"/>
+          </a:p>
+        </p:txBody>
+      </p:sp>
+      <p:sp>
+        <p:nvSpPr>
+          <p:cNvPr id="7" name="TextBox 6"/>
           <p:cNvSpPr txBox="1"/>
           <p:nvPr/>
         </p:nvSpPr>
         <p:spPr>
           <a:xfrm>
-            <a:off x="914400" y="1463040"/>
-            <a:ext cx="10058400" cy="4754880"/>
+            <a:off x="822960" y="1325880"/>
+            <a:ext cx="4754880" cy="365760"/>
           </a:xfrm>
           <a:prstGeom prst="rect">
             <a:avLst/>
@@ -5034,31 +4859,80 @@
           </a:bodyPr>
           <a:lstStyle/>
           <a:p>
+            <a:pPr algn="l">
+              <a:defRPr sz="1600" b="1">
+                <a:solidFill>
+                  <a:srgbClr val="16A34A"/>
+                </a:solidFill>
+                <a:latin typeface="Consolas"/>
+              </a:defRPr>
+            </a:pPr>
+            <a:r>
+              <a:t>CCD</a:t>
+            </a:r>
+          </a:p>
+        </p:txBody>
+      </p:sp>
+      <p:sp>
+        <p:nvSpPr>
+          <p:cNvPr id="8" name="TextBox 7"/>
+          <p:cNvSpPr txBox="1"/>
+          <p:nvPr/>
+        </p:nvSpPr>
+        <p:spPr>
+          <a:xfrm>
+            <a:off x="822960" y="1737360"/>
+            <a:ext cx="4754880" cy="4114800"/>
+          </a:xfrm>
+          <a:prstGeom prst="rect">
+            <a:avLst/>
+          </a:prstGeom>
+          <a:noFill/>
+        </p:spPr>
+        <p:txBody>
+          <a:bodyPr wrap="square">
+            <a:spAutoFit/>
+          </a:bodyPr>
+          <a:lstStyle/>
+          <a:p>
             <a:pPr>
               <a:spcAft>
-                <a:spcPts val="800"/>
-              </a:spcAft>
-              <a:defRPr sz="2200" b="0">
-                <a:solidFill>
-                  <a:srgbClr val="222222"/>
-                </a:solidFill>
-                <a:latin typeface="Calibri"/>
-              </a:defRPr>
-            </a:pPr>
-            <a:r>
-              <a:t>The most popular RSM design</a:t>
+                <a:spcPts val="500"/>
+              </a:spcAft>
+              <a:defRPr sz="1700">
+                <a:solidFill>
+                  <a:srgbClr val="333333"/>
+                </a:solidFill>
+                <a:latin typeface="Inter"/>
+              </a:defRPr>
+            </a:pPr>
+            <a:r>
+              <a:t>Central Composite Design (CCD)</a:t>
             </a:r>
           </a:p>
           <a:p>
             <a:pPr>
               <a:spcAft>
-                <a:spcPts val="800"/>
-              </a:spcAft>
-              <a:defRPr sz="2200" b="0">
-                <a:solidFill>
-                  <a:srgbClr val="222222"/>
-                </a:solidFill>
-                <a:latin typeface="Calibri"/>
+                <a:spcPts val="500"/>
+              </a:spcAft>
+              <a:defRPr sz="1700">
+                <a:solidFill>
+                  <a:srgbClr val="333333"/>
+                </a:solidFill>
+                <a:latin typeface="Inter"/>
+              </a:defRPr>
+            </a:pPr>
+          </a:p>
+          <a:p>
+            <a:pPr>
+              <a:spcAft>
+                <a:spcPts val="500"/>
+              </a:spcAft>
+              <a:defRPr sz="1700">
+                <a:solidFill>
+                  <a:srgbClr val="333333"/>
+                </a:solidFill>
+                <a:latin typeface="Inter"/>
               </a:defRPr>
             </a:pPr>
             <a:r>
@@ -5066,99 +4940,447 @@
             </a:r>
           </a:p>
           <a:p>
-            <a:pPr lvl="1">
-              <a:spcAft>
-                <a:spcPts val="800"/>
-              </a:spcAft>
-              <a:defRPr sz="1900">
-                <a:solidFill>
-                  <a:srgbClr val="222222"/>
-                </a:solidFill>
-                <a:latin typeface="Calibri"/>
-              </a:defRPr>
-            </a:pPr>
-            <a:r>
-              <a:t>Factorial points: 2^k corner points</a:t>
-            </a:r>
-          </a:p>
-          <a:p>
-            <a:pPr lvl="1">
-              <a:spcAft>
-                <a:spcPts val="800"/>
-              </a:spcAft>
-              <a:defRPr sz="1900">
-                <a:solidFill>
-                  <a:srgbClr val="222222"/>
-                </a:solidFill>
-                <a:latin typeface="Calibri"/>
-              </a:defRPr>
-            </a:pPr>
-            <a:r>
-              <a:t>Star (axial) points: 2k points along each axis</a:t>
-            </a:r>
-          </a:p>
-          <a:p>
-            <a:pPr lvl="1">
-              <a:spcAft>
-                <a:spcPts val="800"/>
-              </a:spcAft>
-              <a:defRPr sz="1900">
-                <a:solidFill>
-                  <a:srgbClr val="222222"/>
-                </a:solidFill>
-                <a:latin typeface="Calibri"/>
-              </a:defRPr>
-            </a:pPr>
-            <a:r>
-              <a:t>Center points: 3-6 replicates at the center</a:t>
-            </a:r>
-          </a:p>
-          <a:p>
             <a:pPr>
               <a:spcAft>
-                <a:spcPts val="800"/>
-              </a:spcAft>
-              <a:defRPr sz="2200" b="0">
-                <a:solidFill>
-                  <a:srgbClr val="222222"/>
-                </a:solidFill>
-                <a:latin typeface="Calibri"/>
-              </a:defRPr>
-            </a:pPr>
-            <a:r>
-              <a:t>For 3 factors: 8 + 6 + 6 = 20 runs</a:t>
+                <a:spcPts val="500"/>
+              </a:spcAft>
+              <a:defRPr sz="1700">
+                <a:solidFill>
+                  <a:srgbClr val="333333"/>
+                </a:solidFill>
+                <a:latin typeface="Inter"/>
+              </a:defRPr>
+            </a:pPr>
+            <a:r>
+              <a:t>  • 2ᵏ factorial corner points</a:t>
             </a:r>
           </a:p>
           <a:p>
             <a:pPr>
               <a:spcAft>
-                <a:spcPts val="800"/>
-              </a:spcAft>
-              <a:defRPr sz="2200" b="0">
-                <a:solidFill>
-                  <a:srgbClr val="222222"/>
-                </a:solidFill>
-                <a:latin typeface="Calibri"/>
-              </a:defRPr>
-            </a:pPr>
-            <a:r>
-              <a:t>Can be run sequentially: factorial first, then augment with star points</a:t>
+                <a:spcPts val="500"/>
+              </a:spcAft>
+              <a:defRPr sz="1700">
+                <a:solidFill>
+                  <a:srgbClr val="333333"/>
+                </a:solidFill>
+                <a:latin typeface="Inter"/>
+              </a:defRPr>
+            </a:pPr>
+            <a:r>
+              <a:t>  • 2k star (axial) points</a:t>
             </a:r>
           </a:p>
           <a:p>
             <a:pPr>
               <a:spcAft>
-                <a:spcPts val="800"/>
-              </a:spcAft>
-              <a:defRPr sz="2200" b="0">
-                <a:solidFill>
-                  <a:srgbClr val="222222"/>
-                </a:solidFill>
-                <a:latin typeface="Calibri"/>
-              </a:defRPr>
-            </a:pPr>
-            <a:r>
-              <a:t>Star point distance (alpha) controls rotatability</a:t>
+                <a:spcPts val="500"/>
+              </a:spcAft>
+              <a:defRPr sz="1700">
+                <a:solidFill>
+                  <a:srgbClr val="333333"/>
+                </a:solidFill>
+                <a:latin typeface="Inter"/>
+              </a:defRPr>
+            </a:pPr>
+            <a:r>
+              <a:t>  • 3–6 center point replicates</a:t>
+            </a:r>
+          </a:p>
+          <a:p>
+            <a:pPr>
+              <a:spcAft>
+                <a:spcPts val="500"/>
+              </a:spcAft>
+              <a:defRPr sz="1700">
+                <a:solidFill>
+                  <a:srgbClr val="333333"/>
+                </a:solidFill>
+                <a:latin typeface="Inter"/>
+              </a:defRPr>
+            </a:pPr>
+          </a:p>
+          <a:p>
+            <a:pPr>
+              <a:spcAft>
+                <a:spcPts val="500"/>
+              </a:spcAft>
+              <a:defRPr sz="1700">
+                <a:solidFill>
+                  <a:srgbClr val="333333"/>
+                </a:solidFill>
+                <a:latin typeface="Inter"/>
+              </a:defRPr>
+            </a:pPr>
+            <a:r>
+              <a:t>3 factors: 8+6+6 = 20 runs</a:t>
+            </a:r>
+          </a:p>
+          <a:p>
+            <a:pPr>
+              <a:spcAft>
+                <a:spcPts val="500"/>
+              </a:spcAft>
+              <a:defRPr sz="1700">
+                <a:solidFill>
+                  <a:srgbClr val="333333"/>
+                </a:solidFill>
+                <a:latin typeface="Inter"/>
+              </a:defRPr>
+            </a:pPr>
+            <a:r>
+              <a:t>Can be built sequentially</a:t>
+            </a:r>
+          </a:p>
+          <a:p>
+            <a:pPr>
+              <a:spcAft>
+                <a:spcPts val="500"/>
+              </a:spcAft>
+              <a:defRPr sz="1700">
+                <a:solidFill>
+                  <a:srgbClr val="333333"/>
+                </a:solidFill>
+                <a:latin typeface="Inter"/>
+              </a:defRPr>
+            </a:pPr>
+            <a:r>
+              <a:t>Includes extreme corners</a:t>
+            </a:r>
+          </a:p>
+        </p:txBody>
+      </p:sp>
+      <p:sp>
+        <p:nvSpPr>
+          <p:cNvPr id="9" name="Rounded Rectangle 8"/>
+          <p:cNvSpPr/>
+          <p:nvPr/>
+        </p:nvSpPr>
+        <p:spPr>
+          <a:xfrm>
+            <a:off x="6217920" y="1188720"/>
+            <a:ext cx="5303520" cy="4937760"/>
+          </a:xfrm>
+          <a:prstGeom prst="roundRect">
+            <a:avLst/>
+          </a:prstGeom>
+          <a:solidFill>
+            <a:srgbClr val="EEF2FF"/>
+          </a:solidFill>
+          <a:ln>
+            <a:noFill/>
+          </a:ln>
+        </p:spPr>
+        <p:style>
+          <a:lnRef idx="1">
+            <a:schemeClr val="accent1"/>
+          </a:lnRef>
+          <a:fillRef idx="3">
+            <a:schemeClr val="accent1"/>
+          </a:fillRef>
+          <a:effectRef idx="2">
+            <a:schemeClr val="accent1"/>
+          </a:effectRef>
+          <a:fontRef idx="minor">
+            <a:schemeClr val="lt1"/>
+          </a:fontRef>
+        </p:style>
+        <p:txBody>
+          <a:bodyPr rtlCol="0" anchor="ctr"/>
+          <a:lstStyle/>
+          <a:p>
+            <a:pPr algn="ctr"/>
+          </a:p>
+        </p:txBody>
+      </p:sp>
+      <p:sp>
+        <p:nvSpPr>
+          <p:cNvPr id="10" name="Rectangle 9"/>
+          <p:cNvSpPr/>
+          <p:nvPr/>
+        </p:nvSpPr>
+        <p:spPr>
+          <a:xfrm>
+            <a:off x="6217920" y="1188720"/>
+            <a:ext cx="36576" cy="4937760"/>
+          </a:xfrm>
+          <a:prstGeom prst="rect">
+            <a:avLst/>
+          </a:prstGeom>
+          <a:solidFill>
+            <a:srgbClr val="5046E5"/>
+          </a:solidFill>
+          <a:ln>
+            <a:noFill/>
+          </a:ln>
+        </p:spPr>
+        <p:style>
+          <a:lnRef idx="1">
+            <a:schemeClr val="accent1"/>
+          </a:lnRef>
+          <a:fillRef idx="3">
+            <a:schemeClr val="accent1"/>
+          </a:fillRef>
+          <a:effectRef idx="2">
+            <a:schemeClr val="accent1"/>
+          </a:effectRef>
+          <a:fontRef idx="minor">
+            <a:schemeClr val="lt1"/>
+          </a:fontRef>
+        </p:style>
+        <p:txBody>
+          <a:bodyPr rtlCol="0" anchor="ctr"/>
+          <a:lstStyle/>
+          <a:p>
+            <a:pPr algn="ctr"/>
+          </a:p>
+        </p:txBody>
+      </p:sp>
+      <p:sp>
+        <p:nvSpPr>
+          <p:cNvPr id="11" name="TextBox 10"/>
+          <p:cNvSpPr txBox="1"/>
+          <p:nvPr/>
+        </p:nvSpPr>
+        <p:spPr>
+          <a:xfrm>
+            <a:off x="6492240" y="1325880"/>
+            <a:ext cx="4754880" cy="365760"/>
+          </a:xfrm>
+          <a:prstGeom prst="rect">
+            <a:avLst/>
+          </a:prstGeom>
+          <a:noFill/>
+        </p:spPr>
+        <p:txBody>
+          <a:bodyPr wrap="square">
+            <a:spAutoFit/>
+          </a:bodyPr>
+          <a:lstStyle/>
+          <a:p>
+            <a:pPr algn="l">
+              <a:defRPr sz="1600" b="1">
+                <a:solidFill>
+                  <a:srgbClr val="5046E5"/>
+                </a:solidFill>
+                <a:latin typeface="Consolas"/>
+              </a:defRPr>
+            </a:pPr>
+            <a:r>
+              <a:t>BOX-BEHNKEN</a:t>
+            </a:r>
+          </a:p>
+        </p:txBody>
+      </p:sp>
+      <p:sp>
+        <p:nvSpPr>
+          <p:cNvPr id="12" name="TextBox 11"/>
+          <p:cNvSpPr txBox="1"/>
+          <p:nvPr/>
+        </p:nvSpPr>
+        <p:spPr>
+          <a:xfrm>
+            <a:off x="6492240" y="1737360"/>
+            <a:ext cx="4754880" cy="4114800"/>
+          </a:xfrm>
+          <a:prstGeom prst="rect">
+            <a:avLst/>
+          </a:prstGeom>
+          <a:noFill/>
+        </p:spPr>
+        <p:txBody>
+          <a:bodyPr wrap="square">
+            <a:spAutoFit/>
+          </a:bodyPr>
+          <a:lstStyle/>
+          <a:p>
+            <a:pPr>
+              <a:spcAft>
+                <a:spcPts val="500"/>
+              </a:spcAft>
+              <a:defRPr sz="1700">
+                <a:solidFill>
+                  <a:srgbClr val="333333"/>
+                </a:solidFill>
+                <a:latin typeface="Inter"/>
+              </a:defRPr>
+            </a:pPr>
+            <a:r>
+              <a:t>Box-Behnken Design (BBD)</a:t>
+            </a:r>
+          </a:p>
+          <a:p>
+            <a:pPr>
+              <a:spcAft>
+                <a:spcPts val="500"/>
+              </a:spcAft>
+              <a:defRPr sz="1700">
+                <a:solidFill>
+                  <a:srgbClr val="333333"/>
+                </a:solidFill>
+                <a:latin typeface="Inter"/>
+              </a:defRPr>
+            </a:pPr>
+          </a:p>
+          <a:p>
+            <a:pPr>
+              <a:spcAft>
+                <a:spcPts val="500"/>
+              </a:spcAft>
+              <a:defRPr sz="1700">
+                <a:solidFill>
+                  <a:srgbClr val="333333"/>
+                </a:solidFill>
+                <a:latin typeface="Inter"/>
+              </a:defRPr>
+            </a:pPr>
+            <a:r>
+              <a:t>Does NOT include corner points</a:t>
+            </a:r>
+          </a:p>
+          <a:p>
+            <a:pPr>
+              <a:spcAft>
+                <a:spcPts val="500"/>
+              </a:spcAft>
+              <a:defRPr sz="1700">
+                <a:solidFill>
+                  <a:srgbClr val="333333"/>
+                </a:solidFill>
+                <a:latin typeface="Inter"/>
+              </a:defRPr>
+            </a:pPr>
+            <a:r>
+              <a:t>Good when extremes are costly</a:t>
+            </a:r>
+          </a:p>
+          <a:p>
+            <a:pPr>
+              <a:spcAft>
+                <a:spcPts val="500"/>
+              </a:spcAft>
+              <a:defRPr sz="1700">
+                <a:solidFill>
+                  <a:srgbClr val="333333"/>
+                </a:solidFill>
+                <a:latin typeface="Inter"/>
+              </a:defRPr>
+            </a:pPr>
+            <a:r>
+              <a:t>or dangerous</a:t>
+            </a:r>
+          </a:p>
+          <a:p>
+            <a:pPr>
+              <a:spcAft>
+                <a:spcPts val="500"/>
+              </a:spcAft>
+              <a:defRPr sz="1700">
+                <a:solidFill>
+                  <a:srgbClr val="333333"/>
+                </a:solidFill>
+                <a:latin typeface="Inter"/>
+              </a:defRPr>
+            </a:pPr>
+          </a:p>
+          <a:p>
+            <a:pPr>
+              <a:spcAft>
+                <a:spcPts val="500"/>
+              </a:spcAft>
+              <a:defRPr sz="1700">
+                <a:solidFill>
+                  <a:srgbClr val="333333"/>
+                </a:solidFill>
+                <a:latin typeface="Inter"/>
+              </a:defRPr>
+            </a:pPr>
+            <a:r>
+              <a:t>3 factors: 15 runs (vs. 20 CCD)</a:t>
+            </a:r>
+          </a:p>
+          <a:p>
+            <a:pPr>
+              <a:spcAft>
+                <a:spcPts val="500"/>
+              </a:spcAft>
+              <a:defRPr sz="1700">
+                <a:solidFill>
+                  <a:srgbClr val="333333"/>
+                </a:solidFill>
+                <a:latin typeface="Inter"/>
+              </a:defRPr>
+            </a:pPr>
+            <a:r>
+              <a:t>4 factors: 27 runs (vs. 30 CCD)</a:t>
+            </a:r>
+          </a:p>
+          <a:p>
+            <a:pPr>
+              <a:spcAft>
+                <a:spcPts val="500"/>
+              </a:spcAft>
+              <a:defRPr sz="1700">
+                <a:solidFill>
+                  <a:srgbClr val="333333"/>
+                </a:solidFill>
+                <a:latin typeface="Inter"/>
+              </a:defRPr>
+            </a:pPr>
+            <a:r>
+              <a:t>Slightly less information than CCD</a:t>
+            </a:r>
+          </a:p>
+          <a:p>
+            <a:pPr>
+              <a:spcAft>
+                <a:spcPts val="500"/>
+              </a:spcAft>
+              <a:defRPr sz="1700">
+                <a:solidFill>
+                  <a:srgbClr val="333333"/>
+                </a:solidFill>
+                <a:latin typeface="Inter"/>
+              </a:defRPr>
+            </a:pPr>
+            <a:r>
+              <a:t>but often sufficient</a:t>
+            </a:r>
+          </a:p>
+        </p:txBody>
+      </p:sp>
+      <p:sp>
+        <p:nvSpPr>
+          <p:cNvPr id="13" name="TextBox 12"/>
+          <p:cNvSpPr txBox="1"/>
+          <p:nvPr/>
+        </p:nvSpPr>
+        <p:spPr>
+          <a:xfrm>
+            <a:off x="731520" y="6400800"/>
+            <a:ext cx="10058400" cy="365760"/>
+          </a:xfrm>
+          <a:prstGeom prst="rect">
+            <a:avLst/>
+          </a:prstGeom>
+          <a:noFill/>
+        </p:spPr>
+        <p:txBody>
+          <a:bodyPr wrap="square">
+            <a:spAutoFit/>
+          </a:bodyPr>
+          <a:lstStyle/>
+          <a:p>
+            <a:pPr algn="l">
+              <a:defRPr sz="1000" b="0">
+                <a:solidFill>
+                  <a:srgbClr val="999999"/>
+                </a:solidFill>
+                <a:latin typeface="Consolas"/>
+              </a:defRPr>
+            </a:pPr>
+            <a:r>
+              <a:t>© 2026 Martin J. Gallagher  |  GPL-3.0-or-later  |  doehelper.com</a:t>
             </a:r>
           </a:p>
         </p:txBody>
@@ -5177,7 +5399,7 @@
     <p:bg>
       <p:bgPr>
         <a:solidFill>
-          <a:srgbClr val="FFFFFF"/>
+          <a:srgbClr val="FAFAFA"/>
         </a:solidFill>
         <a:effectLst/>
       </p:bgPr>
@@ -5198,13 +5420,13 @@
         <p:spPr>
           <a:xfrm>
             <a:off x="0" y="0"/>
-            <a:ext cx="12191695" cy="54864"/>
+            <a:ext cx="12191695" cy="45720"/>
           </a:xfrm>
           <a:prstGeom prst="rect">
             <a:avLst/>
           </a:prstGeom>
           <a:solidFill>
-            <a:srgbClr val="007BFF"/>
+            <a:srgbClr val="0D9488"/>
           </a:solidFill>
           <a:ln>
             <a:noFill/>
@@ -5240,8 +5462,8 @@
         </p:nvSpPr>
         <p:spPr>
           <a:xfrm>
-            <a:off x="731520" y="365760"/>
-            <a:ext cx="10515600" cy="822960"/>
+            <a:off x="777240" y="320040"/>
+            <a:ext cx="10058400" cy="548640"/>
           </a:xfrm>
           <a:prstGeom prst="rect">
             <a:avLst/>
@@ -5254,30 +5476,402 @@
           </a:bodyPr>
           <a:lstStyle/>
           <a:p>
-            <a:pPr>
-              <a:defRPr sz="3200" b="1">
-                <a:solidFill>
-                  <a:srgbClr val="222222"/>
-                </a:solidFill>
-                <a:latin typeface="Calibri"/>
-              </a:defRPr>
-            </a:pPr>
-            <a:r>
-              <a:t>Box-Behnken Design</a:t>
-            </a:r>
-          </a:p>
-        </p:txBody>
-      </p:sp>
-      <p:sp>
-        <p:nvSpPr>
-          <p:cNvPr id="4" name="TextBox 3"/>
+            <a:pPr algn="l">
+              <a:defRPr sz="2600" b="1">
+                <a:solidFill>
+                  <a:srgbClr val="111111"/>
+                </a:solidFill>
+                <a:latin typeface="Inter"/>
+              </a:defRPr>
+            </a:pPr>
+            <a:r>
+              <a:t>CCD with doe-helper</a:t>
+            </a:r>
+          </a:p>
+        </p:txBody>
+      </p:sp>
+      <p:sp>
+        <p:nvSpPr>
+          <p:cNvPr id="4" name="Rectangle 3"/>
+          <p:cNvSpPr/>
+          <p:nvPr/>
+        </p:nvSpPr>
+        <p:spPr>
+          <a:xfrm>
+            <a:off x="548640" y="1051560"/>
+            <a:ext cx="10972800" cy="320040"/>
+          </a:xfrm>
+          <a:prstGeom prst="rect">
+            <a:avLst/>
+          </a:prstGeom>
+          <a:solidFill>
+            <a:srgbClr val="222222"/>
+          </a:solidFill>
+          <a:ln>
+            <a:noFill/>
+          </a:ln>
+        </p:spPr>
+        <p:style>
+          <a:lnRef idx="1">
+            <a:schemeClr val="accent1"/>
+          </a:lnRef>
+          <a:fillRef idx="3">
+            <a:schemeClr val="accent1"/>
+          </a:fillRef>
+          <a:effectRef idx="2">
+            <a:schemeClr val="accent1"/>
+          </a:effectRef>
+          <a:fontRef idx="minor">
+            <a:schemeClr val="lt1"/>
+          </a:fontRef>
+        </p:style>
+        <p:txBody>
+          <a:bodyPr rtlCol="0" anchor="ctr"/>
+          <a:lstStyle/>
+          <a:p>
+            <a:pPr algn="ctr"/>
+          </a:p>
+        </p:txBody>
+      </p:sp>
+      <p:sp>
+        <p:nvSpPr>
+          <p:cNvPr id="5" name="TextBox 4"/>
           <p:cNvSpPr txBox="1"/>
           <p:nvPr/>
         </p:nvSpPr>
         <p:spPr>
           <a:xfrm>
-            <a:off x="914400" y="1463040"/>
-            <a:ext cx="10058400" cy="4754880"/>
+            <a:off x="822960" y="1051560"/>
+            <a:ext cx="3657600" cy="320040"/>
+          </a:xfrm>
+          <a:prstGeom prst="rect">
+            <a:avLst/>
+          </a:prstGeom>
+          <a:noFill/>
+        </p:spPr>
+        <p:txBody>
+          <a:bodyPr wrap="square" anchor="ctr">
+            <a:spAutoFit/>
+          </a:bodyPr>
+          <a:lstStyle/>
+          <a:p>
+            <a:pPr algn="l">
+              <a:defRPr sz="1000" b="0">
+                <a:solidFill>
+                  <a:srgbClr val="999999"/>
+                </a:solidFill>
+                <a:latin typeface="Consolas"/>
+              </a:defRPr>
+            </a:pPr>
+            <a:r>
+              <a:t>terminal</a:t>
+            </a:r>
+          </a:p>
+        </p:txBody>
+      </p:sp>
+      <p:sp>
+        <p:nvSpPr>
+          <p:cNvPr id="6" name="Rounded Rectangle 5"/>
+          <p:cNvSpPr/>
+          <p:nvPr/>
+        </p:nvSpPr>
+        <p:spPr>
+          <a:xfrm>
+            <a:off x="548640" y="1371600"/>
+            <a:ext cx="10972800" cy="4389120"/>
+          </a:xfrm>
+          <a:prstGeom prst="roundRect">
+            <a:avLst/>
+          </a:prstGeom>
+          <a:solidFill>
+            <a:srgbClr val="1A1A1A"/>
+          </a:solidFill>
+          <a:ln>
+            <a:noFill/>
+          </a:ln>
+        </p:spPr>
+        <p:style>
+          <a:lnRef idx="1">
+            <a:schemeClr val="accent1"/>
+          </a:lnRef>
+          <a:fillRef idx="3">
+            <a:schemeClr val="accent1"/>
+          </a:fillRef>
+          <a:effectRef idx="2">
+            <a:schemeClr val="accent1"/>
+          </a:effectRef>
+          <a:fontRef idx="minor">
+            <a:schemeClr val="lt1"/>
+          </a:fontRef>
+        </p:style>
+        <p:txBody>
+          <a:bodyPr rtlCol="0" anchor="ctr" wrap="square" lIns="274320" tIns="182880" rIns="274320"/>
+          <a:lstStyle/>
+          <a:p>
+            <a:pPr algn="ctr">
+              <a:spcAft>
+                <a:spcPts val="100"/>
+              </a:spcAft>
+              <a:defRPr sz="1500">
+                <a:solidFill>
+                  <a:srgbClr val="CCCCCC"/>
+                </a:solidFill>
+                <a:latin typeface="Consolas"/>
+              </a:defRPr>
+            </a:pPr>
+            <a:r>
+              <a:t>{</a:t>
+            </a:r>
+          </a:p>
+          <a:p>
+            <a:pPr>
+              <a:spcAft>
+                <a:spcPts val="100"/>
+              </a:spcAft>
+              <a:defRPr sz="1500">
+                <a:solidFill>
+                  <a:srgbClr val="CCCCCC"/>
+                </a:solidFill>
+                <a:latin typeface="Consolas"/>
+              </a:defRPr>
+            </a:pPr>
+            <a:r>
+              <a:t>  "factors": {</a:t>
+            </a:r>
+          </a:p>
+          <a:p>
+            <a:pPr>
+              <a:spcAft>
+                <a:spcPts val="100"/>
+              </a:spcAft>
+              <a:defRPr sz="1500">
+                <a:solidFill>
+                  <a:srgbClr val="CCCCCC"/>
+                </a:solidFill>
+                <a:latin typeface="Consolas"/>
+              </a:defRPr>
+            </a:pPr>
+            <a:r>
+              <a:t>    "temperature": {"low": 150, "high": 200, "units": "C"},</a:t>
+            </a:r>
+          </a:p>
+          <a:p>
+            <a:pPr>
+              <a:spcAft>
+                <a:spcPts val="100"/>
+              </a:spcAft>
+              <a:defRPr sz="1500">
+                <a:solidFill>
+                  <a:srgbClr val="CCCCCC"/>
+                </a:solidFill>
+                <a:latin typeface="Consolas"/>
+              </a:defRPr>
+            </a:pPr>
+            <a:r>
+              <a:t>    "pressure":    {"low": 1.0, "high": 5.0, "units": "bar"},</a:t>
+            </a:r>
+          </a:p>
+          <a:p>
+            <a:pPr>
+              <a:spcAft>
+                <a:spcPts val="100"/>
+              </a:spcAft>
+              <a:defRPr sz="1500">
+                <a:solidFill>
+                  <a:srgbClr val="CCCCCC"/>
+                </a:solidFill>
+                <a:latin typeface="Consolas"/>
+              </a:defRPr>
+            </a:pPr>
+            <a:r>
+              <a:t>    "catalyst":    {"low": 0.5, "high": 1.5, "units": "g"}</a:t>
+            </a:r>
+          </a:p>
+          <a:p>
+            <a:pPr>
+              <a:spcAft>
+                <a:spcPts val="100"/>
+              </a:spcAft>
+              <a:defRPr sz="1500">
+                <a:solidFill>
+                  <a:srgbClr val="CCCCCC"/>
+                </a:solidFill>
+                <a:latin typeface="Consolas"/>
+              </a:defRPr>
+            </a:pPr>
+            <a:r>
+              <a:t>  },</a:t>
+            </a:r>
+          </a:p>
+          <a:p>
+            <a:pPr>
+              <a:spcAft>
+                <a:spcPts val="100"/>
+              </a:spcAft>
+              <a:defRPr sz="1500">
+                <a:solidFill>
+                  <a:srgbClr val="CCCCCC"/>
+                </a:solidFill>
+                <a:latin typeface="Consolas"/>
+              </a:defRPr>
+            </a:pPr>
+            <a:r>
+              <a:t>  "responses": {</a:t>
+            </a:r>
+          </a:p>
+          <a:p>
+            <a:pPr>
+              <a:spcAft>
+                <a:spcPts val="100"/>
+              </a:spcAft>
+              <a:defRPr sz="1500">
+                <a:solidFill>
+                  <a:srgbClr val="CCCCCC"/>
+                </a:solidFill>
+                <a:latin typeface="Consolas"/>
+              </a:defRPr>
+            </a:pPr>
+            <a:r>
+              <a:t>    "yield":  {"units": "%", "target": "maximize"},</a:t>
+            </a:r>
+          </a:p>
+          <a:p>
+            <a:pPr>
+              <a:spcAft>
+                <a:spcPts val="100"/>
+              </a:spcAft>
+              <a:defRPr sz="1500">
+                <a:solidFill>
+                  <a:srgbClr val="CCCCCC"/>
+                </a:solidFill>
+                <a:latin typeface="Consolas"/>
+              </a:defRPr>
+            </a:pPr>
+            <a:r>
+              <a:t>    "purity": {"units": "%", "target": "maximize"}</a:t>
+            </a:r>
+          </a:p>
+          <a:p>
+            <a:pPr>
+              <a:spcAft>
+                <a:spcPts val="100"/>
+              </a:spcAft>
+              <a:defRPr sz="1500">
+                <a:solidFill>
+                  <a:srgbClr val="CCCCCC"/>
+                </a:solidFill>
+                <a:latin typeface="Consolas"/>
+              </a:defRPr>
+            </a:pPr>
+            <a:r>
+              <a:t>  },</a:t>
+            </a:r>
+          </a:p>
+          <a:p>
+            <a:pPr>
+              <a:spcAft>
+                <a:spcPts val="100"/>
+              </a:spcAft>
+              <a:defRPr sz="1500">
+                <a:solidFill>
+                  <a:srgbClr val="CCCCCC"/>
+                </a:solidFill>
+                <a:latin typeface="Consolas"/>
+              </a:defRPr>
+            </a:pPr>
+            <a:r>
+              <a:t>  "design": {"type": "ccd", "center_points": 6}</a:t>
+            </a:r>
+          </a:p>
+          <a:p>
+            <a:pPr>
+              <a:spcAft>
+                <a:spcPts val="100"/>
+              </a:spcAft>
+              <a:defRPr sz="1500">
+                <a:solidFill>
+                  <a:srgbClr val="CCCCCC"/>
+                </a:solidFill>
+                <a:latin typeface="Consolas"/>
+              </a:defRPr>
+            </a:pPr>
+            <a:r>
+              <a:t>}</a:t>
+            </a:r>
+          </a:p>
+          <a:p>
+            <a:pPr>
+              <a:spcAft>
+                <a:spcPts val="100"/>
+              </a:spcAft>
+              <a:defRPr sz="1500">
+                <a:solidFill>
+                  <a:srgbClr val="CCCCCC"/>
+                </a:solidFill>
+                <a:latin typeface="Consolas"/>
+              </a:defRPr>
+            </a:pPr>
+          </a:p>
+          <a:p>
+            <a:pPr>
+              <a:spcAft>
+                <a:spcPts val="100"/>
+              </a:spcAft>
+              <a:defRPr sz="1500">
+                <a:solidFill>
+                  <a:srgbClr val="6EC86E"/>
+                </a:solidFill>
+                <a:latin typeface="Consolas"/>
+              </a:defRPr>
+            </a:pPr>
+            <a:r>
+              <a:t>$ doe generate reactor_rsm/</a:t>
+            </a:r>
+          </a:p>
+          <a:p>
+            <a:pPr>
+              <a:spcAft>
+                <a:spcPts val="100"/>
+              </a:spcAft>
+              <a:defRPr sz="1500">
+                <a:solidFill>
+                  <a:srgbClr val="6EC86E"/>
+                </a:solidFill>
+                <a:latin typeface="Consolas"/>
+              </a:defRPr>
+            </a:pPr>
+            <a:r>
+              <a:t>$ doe info reactor_rsm/</a:t>
+            </a:r>
+          </a:p>
+          <a:p>
+            <a:pPr>
+              <a:spcAft>
+                <a:spcPts val="100"/>
+              </a:spcAft>
+              <a:defRPr sz="1500">
+                <a:solidFill>
+                  <a:srgbClr val="CCCCCC"/>
+                </a:solidFill>
+                <a:latin typeface="Consolas"/>
+              </a:defRPr>
+            </a:pPr>
+            <a:r>
+              <a:t>  Type: ccd  |  Runs: 20  |  Factors: 3</a:t>
+            </a:r>
+          </a:p>
+        </p:txBody>
+      </p:sp>
+      <p:sp>
+        <p:nvSpPr>
+          <p:cNvPr id="7" name="TextBox 6"/>
+          <p:cNvSpPr txBox="1"/>
+          <p:nvPr/>
+        </p:nvSpPr>
+        <p:spPr>
+          <a:xfrm>
+            <a:off x="731520" y="6400800"/>
+            <a:ext cx="10058400" cy="365760"/>
           </a:xfrm>
           <a:prstGeom prst="rect">
             <a:avLst/>
@@ -5290,115 +5884,16 @@
           </a:bodyPr>
           <a:lstStyle/>
           <a:p>
-            <a:pPr>
-              <a:spcAft>
-                <a:spcPts val="800"/>
-              </a:spcAft>
-              <a:defRPr sz="2200" b="0">
-                <a:solidFill>
-                  <a:srgbClr val="222222"/>
-                </a:solidFill>
-                <a:latin typeface="Calibri"/>
-              </a:defRPr>
-            </a:pPr>
-            <a:r>
-              <a:t>Alternative to CCD -- fewer runs for 3+ factors</a:t>
-            </a:r>
-          </a:p>
-          <a:p>
-            <a:pPr>
-              <a:spcAft>
-                <a:spcPts val="800"/>
-              </a:spcAft>
-              <a:defRPr sz="2200" b="0">
-                <a:solidFill>
-                  <a:srgbClr val="222222"/>
-                </a:solidFill>
-                <a:latin typeface="Calibri"/>
-              </a:defRPr>
-            </a:pPr>
-            <a:r>
-              <a:t>Does not include corner points (extreme combinations)</a:t>
-            </a:r>
-          </a:p>
-          <a:p>
-            <a:pPr>
-              <a:spcAft>
-                <a:spcPts val="800"/>
-              </a:spcAft>
-              <a:defRPr sz="2200" b="0">
-                <a:solidFill>
-                  <a:srgbClr val="222222"/>
-                </a:solidFill>
-                <a:latin typeface="Calibri"/>
-              </a:defRPr>
-            </a:pPr>
-            <a:r>
-              <a:t>Good when extremes are costly or dangerous</a:t>
-            </a:r>
-          </a:p>
-          <a:p>
-            <a:pPr>
-              <a:spcAft>
-                <a:spcPts val="800"/>
-              </a:spcAft>
-              <a:defRPr sz="2200" b="0">
-                <a:solidFill>
-                  <a:srgbClr val="222222"/>
-                </a:solidFill>
-                <a:latin typeface="Calibri"/>
-              </a:defRPr>
-            </a:pPr>
-            <a:r>
-              <a:t>For 3 factors: 15 runs (vs. 20 for CCD)</a:t>
-            </a:r>
-          </a:p>
-          <a:p>
-            <a:pPr>
-              <a:spcAft>
-                <a:spcPts val="800"/>
-              </a:spcAft>
-              <a:defRPr sz="2200" b="0">
-                <a:solidFill>
-                  <a:srgbClr val="222222"/>
-                </a:solidFill>
-                <a:latin typeface="Calibri"/>
-              </a:defRPr>
-            </a:pPr>
-            <a:r>
-              <a:t>For 4 factors: 27 runs (vs. 30 for CCD)</a:t>
-            </a:r>
-          </a:p>
-          <a:p>
-            <a:pPr>
-              <a:spcAft>
-                <a:spcPts val="800"/>
-              </a:spcAft>
-              <a:defRPr sz="2200" b="0">
-                <a:solidFill>
-                  <a:srgbClr val="222222"/>
-                </a:solidFill>
-                <a:latin typeface="Calibri"/>
-              </a:defRPr>
-            </a:pPr>
-            <a:r>
-              <a:t>Slightly less information than CCD but often sufficient</a:t>
-            </a:r>
-          </a:p>
-          <a:p>
-            <a:pPr>
-              <a:spcAft>
-                <a:spcPts val="800"/>
-              </a:spcAft>
-              <a:defRPr sz="2200" b="0">
-                <a:solidFill>
-                  <a:srgbClr val="222222"/>
-                </a:solidFill>
-                <a:latin typeface="Calibri"/>
-              </a:defRPr>
-            </a:pPr>
-            <a:r>
-              <a:t>doe-helper: set "type": "box_behnken"</a:t>
+            <a:pPr algn="l">
+              <a:defRPr sz="1000" b="0">
+                <a:solidFill>
+                  <a:srgbClr val="999999"/>
+                </a:solidFill>
+                <a:latin typeface="Consolas"/>
+              </a:defRPr>
+            </a:pPr>
+            <a:r>
+              <a:t>© 2026 Martin J. Gallagher  |  GPL-3.0-or-later  |  doehelper.com</a:t>
             </a:r>
           </a:p>
         </p:txBody>
@@ -5417,7 +5912,7 @@
     <p:bg>
       <p:bgPr>
         <a:solidFill>
-          <a:srgbClr val="FFFFFF"/>
+          <a:srgbClr val="FAFAFA"/>
         </a:solidFill>
         <a:effectLst/>
       </p:bgPr>
@@ -5438,13 +5933,13 @@
         <p:spPr>
           <a:xfrm>
             <a:off x="0" y="0"/>
-            <a:ext cx="12191695" cy="54864"/>
+            <a:ext cx="12191695" cy="45720"/>
           </a:xfrm>
           <a:prstGeom prst="rect">
             <a:avLst/>
           </a:prstGeom>
           <a:solidFill>
-            <a:srgbClr val="00C853"/>
+            <a:srgbClr val="5046E5"/>
           </a:solidFill>
           <a:ln>
             <a:noFill/>
@@ -5474,56 +5969,20 @@
       </p:sp>
       <p:sp>
         <p:nvSpPr>
-          <p:cNvPr id="3" name="TextBox 2"/>
-          <p:cNvSpPr txBox="1"/>
-          <p:nvPr/>
-        </p:nvSpPr>
-        <p:spPr>
-          <a:xfrm>
-            <a:off x="731520" y="365760"/>
-            <a:ext cx="10515600" cy="822960"/>
-          </a:xfrm>
-          <a:prstGeom prst="rect">
-            <a:avLst/>
-          </a:prstGeom>
-          <a:noFill/>
-        </p:spPr>
-        <p:txBody>
-          <a:bodyPr wrap="square">
-            <a:spAutoFit/>
-          </a:bodyPr>
-          <a:lstStyle/>
-          <a:p>
-            <a:pPr>
-              <a:defRPr sz="3000" b="1">
-                <a:solidFill>
-                  <a:srgbClr val="222222"/>
-                </a:solidFill>
-                <a:latin typeface="Calibri"/>
-              </a:defRPr>
-            </a:pPr>
-            <a:r>
-              <a:t>CCD with doe-helper</a:t>
-            </a:r>
-          </a:p>
-        </p:txBody>
-      </p:sp>
-      <p:sp>
-        <p:nvSpPr>
-          <p:cNvPr id="4" name="Rounded Rectangle 3"/>
+          <p:cNvPr id="3" name="Rectangle 2"/>
           <p:cNvSpPr/>
           <p:nvPr/>
         </p:nvSpPr>
         <p:spPr>
           <a:xfrm>
-            <a:off x="731520" y="1371600"/>
-            <a:ext cx="10515600" cy="4114800"/>
-          </a:xfrm>
-          <a:prstGeom prst="roundRect">
+            <a:off x="548640" y="411480"/>
+            <a:ext cx="36576" cy="502920"/>
+          </a:xfrm>
+          <a:prstGeom prst="rect">
             <a:avLst/>
           </a:prstGeom>
           <a:solidFill>
-            <a:srgbClr val="2D2D2D"/>
+            <a:srgbClr val="5046E5"/>
           </a:solidFill>
           <a:ln>
             <a:noFill/>
@@ -5544,307 +6003,261 @@
           </a:fontRef>
         </p:style>
         <p:txBody>
-          <a:bodyPr rtlCol="0" anchor="ctr" wrap="square" lIns="274320" tIns="274320"/>
-          <a:lstStyle/>
-          <a:p>
-            <a:pPr algn="ctr">
-              <a:spcAft>
-                <a:spcPts val="200"/>
-              </a:spcAft>
-              <a:defRPr sz="1800">
-                <a:solidFill>
-                  <a:srgbClr val="D4D4D4"/>
+          <a:bodyPr rtlCol="0" anchor="ctr"/>
+          <a:lstStyle/>
+          <a:p>
+            <a:pPr algn="ctr"/>
+          </a:p>
+        </p:txBody>
+      </p:sp>
+      <p:sp>
+        <p:nvSpPr>
+          <p:cNvPr id="4" name="TextBox 3"/>
+          <p:cNvSpPr txBox="1"/>
+          <p:nvPr/>
+        </p:nvSpPr>
+        <p:spPr>
+          <a:xfrm>
+            <a:off x="777240" y="365760"/>
+            <a:ext cx="10058400" cy="640080"/>
+          </a:xfrm>
+          <a:prstGeom prst="rect">
+            <a:avLst/>
+          </a:prstGeom>
+          <a:noFill/>
+        </p:spPr>
+        <p:txBody>
+          <a:bodyPr wrap="square">
+            <a:spAutoFit/>
+          </a:bodyPr>
+          <a:lstStyle/>
+          <a:p>
+            <a:pPr algn="l">
+              <a:defRPr sz="2800" b="1">
+                <a:solidFill>
+                  <a:srgbClr val="111111"/>
+                </a:solidFill>
+                <a:latin typeface="Inter"/>
+              </a:defRPr>
+            </a:pPr>
+            <a:r>
+              <a:t>Latin Hypercube Sampling &amp; Design Selection</a:t>
+            </a:r>
+          </a:p>
+        </p:txBody>
+      </p:sp>
+      <p:sp>
+        <p:nvSpPr>
+          <p:cNvPr id="5" name="TextBox 4"/>
+          <p:cNvSpPr txBox="1"/>
+          <p:nvPr/>
+        </p:nvSpPr>
+        <p:spPr>
+          <a:xfrm>
+            <a:off x="822960" y="1188720"/>
+            <a:ext cx="10241280" cy="5120640"/>
+          </a:xfrm>
+          <a:prstGeom prst="rect">
+            <a:avLst/>
+          </a:prstGeom>
+          <a:noFill/>
+        </p:spPr>
+        <p:txBody>
+          <a:bodyPr wrap="square">
+            <a:spAutoFit/>
+          </a:bodyPr>
+          <a:lstStyle/>
+          <a:p>
+            <a:pPr>
+              <a:spcAft>
+                <a:spcPts val="600"/>
+              </a:spcAft>
+              <a:defRPr sz="1900">
+                <a:solidFill>
+                  <a:srgbClr val="333333"/>
+                </a:solidFill>
+                <a:latin typeface="Inter"/>
+              </a:defRPr>
+            </a:pPr>
+            <a:r>
+              <a:t>LHS: space-filling design, not model-based</a:t>
+            </a:r>
+          </a:p>
+          <a:p>
+            <a:pPr lvl="1">
+              <a:spcAft>
+                <a:spcPts val="600"/>
+              </a:spcAft>
+              <a:defRPr sz="1700">
+                <a:solidFill>
+                  <a:srgbClr val="666666"/>
+                </a:solidFill>
+                <a:latin typeface="Inter"/>
+              </a:defRPr>
+            </a:pPr>
+            <a:r>
+              <a:t>Samples spread evenly across the entire factor space</a:t>
+            </a:r>
+          </a:p>
+          <a:p>
+            <a:pPr lvl="1">
+              <a:spcAft>
+                <a:spcPts val="600"/>
+              </a:spcAft>
+              <a:defRPr sz="1700">
+                <a:solidFill>
+                  <a:srgbClr val="666666"/>
+                </a:solidFill>
+                <a:latin typeface="Inter"/>
+              </a:defRPr>
+            </a:pPr>
+            <a:r>
+              <a:t>Good for computer experiments and simulations</a:t>
+            </a:r>
+          </a:p>
+          <a:p>
+            <a:pPr lvl="1">
+              <a:spcAft>
+                <a:spcPts val="600"/>
+              </a:spcAft>
+              <a:defRPr sz="1700">
+                <a:solidFill>
+                  <a:srgbClr val="666666"/>
+                </a:solidFill>
+                <a:latin typeface="Inter"/>
+              </a:defRPr>
+            </a:pPr>
+            <a:r>
+              <a:t>doe-helper: "type": "latin_hypercube", "runs": N</a:t>
+            </a:r>
+          </a:p>
+          <a:p>
+            <a:pPr>
+              <a:spcAft>
+                <a:spcPts val="600"/>
+              </a:spcAft>
+              <a:defRPr sz="1900">
+                <a:solidFill>
+                  <a:srgbClr val="333333"/>
+                </a:solidFill>
+                <a:latin typeface="Inter"/>
+              </a:defRPr>
+            </a:pPr>
+          </a:p>
+          <a:p>
+            <a:pPr>
+              <a:spcAft>
+                <a:spcPts val="600"/>
+              </a:spcAft>
+              <a:defRPr sz="1900">
+                <a:solidFill>
+                  <a:srgbClr val="333333"/>
+                </a:solidFill>
+                <a:latin typeface="Inter"/>
+              </a:defRPr>
+            </a:pPr>
+            <a:r>
+              <a:t>Design selection guide:</a:t>
+            </a:r>
+          </a:p>
+          <a:p>
+            <a:pPr lvl="1">
+              <a:spcAft>
+                <a:spcPts val="600"/>
+              </a:spcAft>
+              <a:defRPr sz="1700">
+                <a:solidFill>
+                  <a:srgbClr val="666666"/>
+                </a:solidFill>
+                <a:latin typeface="Inter"/>
+              </a:defRPr>
+            </a:pPr>
+            <a:r>
+              <a:t>2–3 factors, need optimum → CCD or Box-Behnken</a:t>
+            </a:r>
+          </a:p>
+          <a:p>
+            <a:pPr lvl="1">
+              <a:spcAft>
+                <a:spcPts val="600"/>
+              </a:spcAft>
+              <a:defRPr sz="1700">
+                <a:solidFill>
+                  <a:srgbClr val="666666"/>
+                </a:solidFill>
+                <a:latin typeface="Inter"/>
+              </a:defRPr>
+            </a:pPr>
+            <a:r>
+              <a:t>Avoid extreme corners → Box-Behnken</a:t>
+            </a:r>
+          </a:p>
+          <a:p>
+            <a:pPr lvl="1">
+              <a:spcAft>
+                <a:spcPts val="600"/>
+              </a:spcAft>
+              <a:defRPr sz="1700">
+                <a:solidFill>
+                  <a:srgbClr val="666666"/>
+                </a:solidFill>
+                <a:latin typeface="Inter"/>
+              </a:defRPr>
+            </a:pPr>
+            <a:r>
+              <a:t>Unknown model, simulation → Latin Hypercube</a:t>
+            </a:r>
+          </a:p>
+          <a:p>
+            <a:pPr lvl="1">
+              <a:spcAft>
+                <a:spcPts val="600"/>
+              </a:spcAft>
+              <a:defRPr sz="1700">
+                <a:solidFill>
+                  <a:srgbClr val="666666"/>
+                </a:solidFill>
+                <a:latin typeface="Inter"/>
+              </a:defRPr>
+            </a:pPr>
+            <a:r>
+              <a:t>Constrained factor space → D-Optimal</a:t>
+            </a:r>
+          </a:p>
+        </p:txBody>
+      </p:sp>
+      <p:sp>
+        <p:nvSpPr>
+          <p:cNvPr id="6" name="TextBox 5"/>
+          <p:cNvSpPr txBox="1"/>
+          <p:nvPr/>
+        </p:nvSpPr>
+        <p:spPr>
+          <a:xfrm>
+            <a:off x="731520" y="6400800"/>
+            <a:ext cx="10058400" cy="365760"/>
+          </a:xfrm>
+          <a:prstGeom prst="rect">
+            <a:avLst/>
+          </a:prstGeom>
+          <a:noFill/>
+        </p:spPr>
+        <p:txBody>
+          <a:bodyPr wrap="square">
+            <a:spAutoFit/>
+          </a:bodyPr>
+          <a:lstStyle/>
+          <a:p>
+            <a:pPr algn="l">
+              <a:defRPr sz="1000" b="0">
+                <a:solidFill>
+                  <a:srgbClr val="999999"/>
                 </a:solidFill>
                 <a:latin typeface="Consolas"/>
               </a:defRPr>
             </a:pPr>
             <a:r>
-              <a:t>{</a:t>
-            </a:r>
-          </a:p>
-          <a:p>
-            <a:pPr>
-              <a:spcAft>
-                <a:spcPts val="200"/>
-              </a:spcAft>
-              <a:defRPr sz="1800">
-                <a:solidFill>
-                  <a:srgbClr val="D4D4D4"/>
-                </a:solidFill>
-                <a:latin typeface="Consolas"/>
-              </a:defRPr>
-            </a:pPr>
-            <a:r>
-              <a:t>  "factors": {</a:t>
-            </a:r>
-          </a:p>
-          <a:p>
-            <a:pPr>
-              <a:spcAft>
-                <a:spcPts val="200"/>
-              </a:spcAft>
-              <a:defRPr sz="1800">
-                <a:solidFill>
-                  <a:srgbClr val="D4D4D4"/>
-                </a:solidFill>
-                <a:latin typeface="Consolas"/>
-              </a:defRPr>
-            </a:pPr>
-            <a:r>
-              <a:t>    "temperature": {"low": 150, "high": 200, "units": "C"},</a:t>
-            </a:r>
-          </a:p>
-          <a:p>
-            <a:pPr>
-              <a:spcAft>
-                <a:spcPts val="200"/>
-              </a:spcAft>
-              <a:defRPr sz="1800">
-                <a:solidFill>
-                  <a:srgbClr val="D4D4D4"/>
-                </a:solidFill>
-                <a:latin typeface="Consolas"/>
-              </a:defRPr>
-            </a:pPr>
-            <a:r>
-              <a:t>    "pressure":    {"low": 1.0, "high": 5.0, "units": "bar"},</a:t>
-            </a:r>
-          </a:p>
-          <a:p>
-            <a:pPr>
-              <a:spcAft>
-                <a:spcPts val="200"/>
-              </a:spcAft>
-              <a:defRPr sz="1800">
-                <a:solidFill>
-                  <a:srgbClr val="D4D4D4"/>
-                </a:solidFill>
-                <a:latin typeface="Consolas"/>
-              </a:defRPr>
-            </a:pPr>
-            <a:r>
-              <a:t>    "catalyst":    {"low": 0.5, "high": 1.5, "units": "g"}</a:t>
-            </a:r>
-          </a:p>
-          <a:p>
-            <a:pPr>
-              <a:spcAft>
-                <a:spcPts val="200"/>
-              </a:spcAft>
-              <a:defRPr sz="1800">
-                <a:solidFill>
-                  <a:srgbClr val="D4D4D4"/>
-                </a:solidFill>
-                <a:latin typeface="Consolas"/>
-              </a:defRPr>
-            </a:pPr>
-            <a:r>
-              <a:t>  },</a:t>
-            </a:r>
-          </a:p>
-          <a:p>
-            <a:pPr>
-              <a:spcAft>
-                <a:spcPts val="200"/>
-              </a:spcAft>
-              <a:defRPr sz="1800">
-                <a:solidFill>
-                  <a:srgbClr val="D4D4D4"/>
-                </a:solidFill>
-                <a:latin typeface="Consolas"/>
-              </a:defRPr>
-            </a:pPr>
-            <a:r>
-              <a:t>  "responses": {</a:t>
-            </a:r>
-          </a:p>
-          <a:p>
-            <a:pPr>
-              <a:spcAft>
-                <a:spcPts val="200"/>
-              </a:spcAft>
-              <a:defRPr sz="1800">
-                <a:solidFill>
-                  <a:srgbClr val="D4D4D4"/>
-                </a:solidFill>
-                <a:latin typeface="Consolas"/>
-              </a:defRPr>
-            </a:pPr>
-            <a:r>
-              <a:t>    "yield":  {"units": "%", "target": "maximize"},</a:t>
-            </a:r>
-          </a:p>
-          <a:p>
-            <a:pPr>
-              <a:spcAft>
-                <a:spcPts val="200"/>
-              </a:spcAft>
-              <a:defRPr sz="1800">
-                <a:solidFill>
-                  <a:srgbClr val="D4D4D4"/>
-                </a:solidFill>
-                <a:latin typeface="Consolas"/>
-              </a:defRPr>
-            </a:pPr>
-            <a:r>
-              <a:t>    "purity": {"units": "%", "target": "maximize"}</a:t>
-            </a:r>
-          </a:p>
-          <a:p>
-            <a:pPr>
-              <a:spcAft>
-                <a:spcPts val="200"/>
-              </a:spcAft>
-              <a:defRPr sz="1800">
-                <a:solidFill>
-                  <a:srgbClr val="D4D4D4"/>
-                </a:solidFill>
-                <a:latin typeface="Consolas"/>
-              </a:defRPr>
-            </a:pPr>
-            <a:r>
-              <a:t>  },</a:t>
-            </a:r>
-          </a:p>
-          <a:p>
-            <a:pPr>
-              <a:spcAft>
-                <a:spcPts val="200"/>
-              </a:spcAft>
-              <a:defRPr sz="1800">
-                <a:solidFill>
-                  <a:srgbClr val="D4D4D4"/>
-                </a:solidFill>
-                <a:latin typeface="Consolas"/>
-              </a:defRPr>
-            </a:pPr>
-            <a:r>
-              <a:t>  "design": {</a:t>
-            </a:r>
-          </a:p>
-          <a:p>
-            <a:pPr>
-              <a:spcAft>
-                <a:spcPts val="200"/>
-              </a:spcAft>
-              <a:defRPr sz="1800">
-                <a:solidFill>
-                  <a:srgbClr val="D4D4D4"/>
-                </a:solidFill>
-                <a:latin typeface="Consolas"/>
-              </a:defRPr>
-            </a:pPr>
-            <a:r>
-              <a:t>    "type": "ccd",</a:t>
-            </a:r>
-          </a:p>
-          <a:p>
-            <a:pPr>
-              <a:spcAft>
-                <a:spcPts val="200"/>
-              </a:spcAft>
-              <a:defRPr sz="1800">
-                <a:solidFill>
-                  <a:srgbClr val="D4D4D4"/>
-                </a:solidFill>
-                <a:latin typeface="Consolas"/>
-              </a:defRPr>
-            </a:pPr>
-            <a:r>
-              <a:t>    "center_points": 6</a:t>
-            </a:r>
-          </a:p>
-          <a:p>
-            <a:pPr>
-              <a:spcAft>
-                <a:spcPts val="200"/>
-              </a:spcAft>
-              <a:defRPr sz="1800">
-                <a:solidFill>
-                  <a:srgbClr val="D4D4D4"/>
-                </a:solidFill>
-                <a:latin typeface="Consolas"/>
-              </a:defRPr>
-            </a:pPr>
-            <a:r>
-              <a:t>  }</a:t>
-            </a:r>
-          </a:p>
-          <a:p>
-            <a:pPr>
-              <a:spcAft>
-                <a:spcPts val="200"/>
-              </a:spcAft>
-              <a:defRPr sz="1800">
-                <a:solidFill>
-                  <a:srgbClr val="D4D4D4"/>
-                </a:solidFill>
-                <a:latin typeface="Consolas"/>
-              </a:defRPr>
-            </a:pPr>
-            <a:r>
-              <a:t>}</a:t>
-            </a:r>
-          </a:p>
-          <a:p>
-            <a:pPr>
-              <a:spcAft>
-                <a:spcPts val="200"/>
-              </a:spcAft>
-              <a:defRPr sz="1800">
-                <a:solidFill>
-                  <a:srgbClr val="D4D4D4"/>
-                </a:solidFill>
-                <a:latin typeface="Consolas"/>
-              </a:defRPr>
-            </a:pPr>
-          </a:p>
-          <a:p>
-            <a:pPr>
-              <a:spcAft>
-                <a:spcPts val="200"/>
-              </a:spcAft>
-              <a:defRPr sz="1800">
-                <a:solidFill>
-                  <a:srgbClr val="D4D4D4"/>
-                </a:solidFill>
-                <a:latin typeface="Consolas"/>
-              </a:defRPr>
-            </a:pPr>
-            <a:r>
-              <a:t>$ doe generate reactor_rsm/</a:t>
-            </a:r>
-          </a:p>
-          <a:p>
-            <a:pPr>
-              <a:spcAft>
-                <a:spcPts val="200"/>
-              </a:spcAft>
-              <a:defRPr sz="1800">
-                <a:solidFill>
-                  <a:srgbClr val="D4D4D4"/>
-                </a:solidFill>
-                <a:latin typeface="Consolas"/>
-              </a:defRPr>
-            </a:pPr>
-            <a:r>
-              <a:t>$ doe info reactor_rsm/</a:t>
-            </a:r>
-          </a:p>
-          <a:p>
-            <a:pPr>
-              <a:spcAft>
-                <a:spcPts val="200"/>
-              </a:spcAft>
-              <a:defRPr sz="1800">
-                <a:solidFill>
-                  <a:srgbClr val="D4D4D4"/>
-                </a:solidFill>
-                <a:latin typeface="Consolas"/>
-              </a:defRPr>
-            </a:pPr>
-            <a:r>
-              <a:t>  Type: ccd | Runs: 20 | Factors: 3</a:t>
+              <a:t>© 2026 Martin J. Gallagher  |  GPL-3.0-or-later  |  doehelper.com</a:t>
             </a:r>
           </a:p>
         </p:txBody>
@@ -5863,7 +6276,7 @@
     <p:bg>
       <p:bgPr>
         <a:solidFill>
-          <a:srgbClr val="FFFFFF"/>
+          <a:srgbClr val="FAFAFA"/>
         </a:solidFill>
         <a:effectLst/>
       </p:bgPr>
@@ -5884,13 +6297,13 @@
         <p:spPr>
           <a:xfrm>
             <a:off x="0" y="0"/>
-            <a:ext cx="12191695" cy="54864"/>
+            <a:ext cx="12191695" cy="45720"/>
           </a:xfrm>
           <a:prstGeom prst="rect">
             <a:avLst/>
           </a:prstGeom>
           <a:solidFill>
-            <a:srgbClr val="007BFF"/>
+            <a:srgbClr val="0D9488"/>
           </a:solidFill>
           <a:ln>
             <a:noFill/>
@@ -5926,8 +6339,8 @@
         </p:nvSpPr>
         <p:spPr>
           <a:xfrm>
-            <a:off x="731520" y="365760"/>
-            <a:ext cx="10515600" cy="822960"/>
+            <a:off x="777240" y="320040"/>
+            <a:ext cx="10058400" cy="548640"/>
           </a:xfrm>
           <a:prstGeom prst="rect">
             <a:avLst/>
@@ -5940,30 +6353,377 @@
           </a:bodyPr>
           <a:lstStyle/>
           <a:p>
-            <a:pPr>
-              <a:defRPr sz="3200" b="1">
-                <a:solidFill>
-                  <a:srgbClr val="222222"/>
-                </a:solidFill>
-                <a:latin typeface="Calibri"/>
-              </a:defRPr>
-            </a:pPr>
-            <a:r>
-              <a:t>Latin Hypercube Sampling (LHS)</a:t>
-            </a:r>
-          </a:p>
-        </p:txBody>
-      </p:sp>
-      <p:sp>
-        <p:nvSpPr>
-          <p:cNvPr id="4" name="TextBox 3"/>
+            <a:pPr algn="l">
+              <a:defRPr sz="2600" b="1">
+                <a:solidFill>
+                  <a:srgbClr val="111111"/>
+                </a:solidFill>
+                <a:latin typeface="Inter"/>
+              </a:defRPr>
+            </a:pPr>
+            <a:r>
+              <a:t>Optimization with doe-helper</a:t>
+            </a:r>
+          </a:p>
+        </p:txBody>
+      </p:sp>
+      <p:sp>
+        <p:nvSpPr>
+          <p:cNvPr id="4" name="Rectangle 3"/>
+          <p:cNvSpPr/>
+          <p:nvPr/>
+        </p:nvSpPr>
+        <p:spPr>
+          <a:xfrm>
+            <a:off x="548640" y="1051560"/>
+            <a:ext cx="10972800" cy="320040"/>
+          </a:xfrm>
+          <a:prstGeom prst="rect">
+            <a:avLst/>
+          </a:prstGeom>
+          <a:solidFill>
+            <a:srgbClr val="222222"/>
+          </a:solidFill>
+          <a:ln>
+            <a:noFill/>
+          </a:ln>
+        </p:spPr>
+        <p:style>
+          <a:lnRef idx="1">
+            <a:schemeClr val="accent1"/>
+          </a:lnRef>
+          <a:fillRef idx="3">
+            <a:schemeClr val="accent1"/>
+          </a:fillRef>
+          <a:effectRef idx="2">
+            <a:schemeClr val="accent1"/>
+          </a:effectRef>
+          <a:fontRef idx="minor">
+            <a:schemeClr val="lt1"/>
+          </a:fontRef>
+        </p:style>
+        <p:txBody>
+          <a:bodyPr rtlCol="0" anchor="ctr"/>
+          <a:lstStyle/>
+          <a:p>
+            <a:pPr algn="ctr"/>
+          </a:p>
+        </p:txBody>
+      </p:sp>
+      <p:sp>
+        <p:nvSpPr>
+          <p:cNvPr id="5" name="TextBox 4"/>
           <p:cNvSpPr txBox="1"/>
           <p:nvPr/>
         </p:nvSpPr>
         <p:spPr>
           <a:xfrm>
-            <a:off x="914400" y="1463040"/>
-            <a:ext cx="10058400" cy="4754880"/>
+            <a:off x="822960" y="1051560"/>
+            <a:ext cx="3657600" cy="320040"/>
+          </a:xfrm>
+          <a:prstGeom prst="rect">
+            <a:avLst/>
+          </a:prstGeom>
+          <a:noFill/>
+        </p:spPr>
+        <p:txBody>
+          <a:bodyPr wrap="square" anchor="ctr">
+            <a:spAutoFit/>
+          </a:bodyPr>
+          <a:lstStyle/>
+          <a:p>
+            <a:pPr algn="l">
+              <a:defRPr sz="1000" b="0">
+                <a:solidFill>
+                  <a:srgbClr val="999999"/>
+                </a:solidFill>
+                <a:latin typeface="Consolas"/>
+              </a:defRPr>
+            </a:pPr>
+            <a:r>
+              <a:t>terminal</a:t>
+            </a:r>
+          </a:p>
+        </p:txBody>
+      </p:sp>
+      <p:sp>
+        <p:nvSpPr>
+          <p:cNvPr id="6" name="Rounded Rectangle 5"/>
+          <p:cNvSpPr/>
+          <p:nvPr/>
+        </p:nvSpPr>
+        <p:spPr>
+          <a:xfrm>
+            <a:off x="548640" y="1371600"/>
+            <a:ext cx="10972800" cy="3931920"/>
+          </a:xfrm>
+          <a:prstGeom prst="roundRect">
+            <a:avLst/>
+          </a:prstGeom>
+          <a:solidFill>
+            <a:srgbClr val="1A1A1A"/>
+          </a:solidFill>
+          <a:ln>
+            <a:noFill/>
+          </a:ln>
+        </p:spPr>
+        <p:style>
+          <a:lnRef idx="1">
+            <a:schemeClr val="accent1"/>
+          </a:lnRef>
+          <a:fillRef idx="3">
+            <a:schemeClr val="accent1"/>
+          </a:fillRef>
+          <a:effectRef idx="2">
+            <a:schemeClr val="accent1"/>
+          </a:effectRef>
+          <a:fontRef idx="minor">
+            <a:schemeClr val="lt1"/>
+          </a:fontRef>
+        </p:style>
+        <p:txBody>
+          <a:bodyPr rtlCol="0" anchor="ctr" wrap="square" lIns="274320" tIns="182880" rIns="274320"/>
+          <a:lstStyle/>
+          <a:p>
+            <a:pPr algn="ctr">
+              <a:spcAft>
+                <a:spcPts val="100"/>
+              </a:spcAft>
+              <a:defRPr sz="1500">
+                <a:solidFill>
+                  <a:srgbClr val="6EC86E"/>
+                </a:solidFill>
+                <a:latin typeface="Consolas"/>
+              </a:defRPr>
+            </a:pPr>
+            <a:r>
+              <a:t>$ doe optimize reactor_rsm/</a:t>
+            </a:r>
+          </a:p>
+          <a:p>
+            <a:pPr>
+              <a:spcAft>
+                <a:spcPts val="100"/>
+              </a:spcAft>
+              <a:defRPr sz="1500">
+                <a:solidFill>
+                  <a:srgbClr val="CCCCCC"/>
+                </a:solidFill>
+                <a:latin typeface="Consolas"/>
+              </a:defRPr>
+            </a:pPr>
+          </a:p>
+          <a:p>
+            <a:pPr>
+              <a:spcAft>
+                <a:spcPts val="100"/>
+              </a:spcAft>
+              <a:defRPr sz="1500">
+                <a:solidFill>
+                  <a:srgbClr val="CCCCCC"/>
+                </a:solidFill>
+                <a:latin typeface="Consolas"/>
+              </a:defRPr>
+            </a:pPr>
+            <a:r>
+              <a:t>Optimization Results</a:t>
+            </a:r>
+          </a:p>
+          <a:p>
+            <a:pPr>
+              <a:spcAft>
+                <a:spcPts val="100"/>
+              </a:spcAft>
+              <a:defRPr sz="1500">
+                <a:solidFill>
+                  <a:srgbClr val="CCCCCC"/>
+                </a:solidFill>
+                <a:latin typeface="Consolas"/>
+              </a:defRPr>
+            </a:pPr>
+            <a:r>
+              <a:t>  Method: L-BFGS-B with 20 random restarts</a:t>
+            </a:r>
+          </a:p>
+          <a:p>
+            <a:pPr>
+              <a:spcAft>
+                <a:spcPts val="100"/>
+              </a:spcAft>
+              <a:defRPr sz="1500">
+                <a:solidFill>
+                  <a:srgbClr val="CCCCCC"/>
+                </a:solidFill>
+                <a:latin typeface="Consolas"/>
+              </a:defRPr>
+            </a:pPr>
+          </a:p>
+          <a:p>
+            <a:pPr>
+              <a:spcAft>
+                <a:spcPts val="100"/>
+              </a:spcAft>
+              <a:defRPr sz="1500">
+                <a:solidFill>
+                  <a:srgbClr val="CCCCCC"/>
+                </a:solidFill>
+                <a:latin typeface="Consolas"/>
+              </a:defRPr>
+            </a:pPr>
+            <a:r>
+              <a:t>  Optimal Settings:</a:t>
+            </a:r>
+          </a:p>
+          <a:p>
+            <a:pPr>
+              <a:spcAft>
+                <a:spcPts val="100"/>
+              </a:spcAft>
+              <a:defRPr sz="1500">
+                <a:solidFill>
+                  <a:srgbClr val="CCCCCC"/>
+                </a:solidFill>
+                <a:latin typeface="Consolas"/>
+              </a:defRPr>
+            </a:pPr>
+            <a:r>
+              <a:t>    temperature: 182.3 C</a:t>
+            </a:r>
+          </a:p>
+          <a:p>
+            <a:pPr>
+              <a:spcAft>
+                <a:spcPts val="100"/>
+              </a:spcAft>
+              <a:defRPr sz="1500">
+                <a:solidFill>
+                  <a:srgbClr val="CCCCCC"/>
+                </a:solidFill>
+                <a:latin typeface="Consolas"/>
+              </a:defRPr>
+            </a:pPr>
+            <a:r>
+              <a:t>    pressure:    3.8 bar</a:t>
+            </a:r>
+          </a:p>
+          <a:p>
+            <a:pPr>
+              <a:spcAft>
+                <a:spcPts val="100"/>
+              </a:spcAft>
+              <a:defRPr sz="1500">
+                <a:solidFill>
+                  <a:srgbClr val="CCCCCC"/>
+                </a:solidFill>
+                <a:latin typeface="Consolas"/>
+              </a:defRPr>
+            </a:pPr>
+            <a:r>
+              <a:t>    catalyst:    1.2 g</a:t>
+            </a:r>
+          </a:p>
+          <a:p>
+            <a:pPr>
+              <a:spcAft>
+                <a:spcPts val="100"/>
+              </a:spcAft>
+              <a:defRPr sz="1500">
+                <a:solidFill>
+                  <a:srgbClr val="CCCCCC"/>
+                </a:solidFill>
+                <a:latin typeface="Consolas"/>
+              </a:defRPr>
+            </a:pPr>
+          </a:p>
+          <a:p>
+            <a:pPr>
+              <a:spcAft>
+                <a:spcPts val="100"/>
+              </a:spcAft>
+              <a:defRPr sz="1500">
+                <a:solidFill>
+                  <a:srgbClr val="CCCCCC"/>
+                </a:solidFill>
+                <a:latin typeface="Consolas"/>
+              </a:defRPr>
+            </a:pPr>
+            <a:r>
+              <a:t>  Predicted Responses:</a:t>
+            </a:r>
+          </a:p>
+          <a:p>
+            <a:pPr>
+              <a:spcAft>
+                <a:spcPts val="100"/>
+              </a:spcAft>
+              <a:defRPr sz="1500">
+                <a:solidFill>
+                  <a:srgbClr val="CCCCCC"/>
+                </a:solidFill>
+                <a:latin typeface="Consolas"/>
+              </a:defRPr>
+            </a:pPr>
+            <a:r>
+              <a:t>    yield:  94.2%  (target: maximize)</a:t>
+            </a:r>
+          </a:p>
+          <a:p>
+            <a:pPr>
+              <a:spcAft>
+                <a:spcPts val="100"/>
+              </a:spcAft>
+              <a:defRPr sz="1500">
+                <a:solidFill>
+                  <a:srgbClr val="CCCCCC"/>
+                </a:solidFill>
+                <a:latin typeface="Consolas"/>
+              </a:defRPr>
+            </a:pPr>
+            <a:r>
+              <a:t>    purity: 98.7%  (target: maximize)</a:t>
+            </a:r>
+          </a:p>
+          <a:p>
+            <a:pPr>
+              <a:spcAft>
+                <a:spcPts val="100"/>
+              </a:spcAft>
+              <a:defRPr sz="1500">
+                <a:solidFill>
+                  <a:srgbClr val="CCCCCC"/>
+                </a:solidFill>
+                <a:latin typeface="Consolas"/>
+              </a:defRPr>
+            </a:pPr>
+          </a:p>
+          <a:p>
+            <a:pPr>
+              <a:spcAft>
+                <a:spcPts val="100"/>
+              </a:spcAft>
+              <a:defRPr sz="1500">
+                <a:solidFill>
+                  <a:srgbClr val="CCCCCC"/>
+                </a:solidFill>
+                <a:latin typeface="Consolas"/>
+              </a:defRPr>
+            </a:pPr>
+            <a:r>
+              <a:t>  Desirability: 0.93</a:t>
+            </a:r>
+          </a:p>
+        </p:txBody>
+      </p:sp>
+      <p:sp>
+        <p:nvSpPr>
+          <p:cNvPr id="7" name="TextBox 6"/>
+          <p:cNvSpPr txBox="1"/>
+          <p:nvPr/>
+        </p:nvSpPr>
+        <p:spPr>
+          <a:xfrm>
+            <a:off x="822960" y="5349240"/>
+            <a:ext cx="10058400" cy="640080"/>
           </a:xfrm>
           <a:prstGeom prst="rect">
             <a:avLst/>
@@ -5976,115 +6736,52 @@
           </a:bodyPr>
           <a:lstStyle/>
           <a:p>
-            <a:pPr>
-              <a:spcAft>
-                <a:spcPts val="800"/>
-              </a:spcAft>
-              <a:defRPr sz="2200" b="0">
-                <a:solidFill>
-                  <a:srgbClr val="222222"/>
-                </a:solidFill>
-                <a:latin typeface="Calibri"/>
-              </a:defRPr>
-            </a:pPr>
-            <a:r>
-              <a:t>Space-filling design: samples spread evenly across the space</a:t>
-            </a:r>
-          </a:p>
-          <a:p>
-            <a:pPr>
-              <a:spcAft>
-                <a:spcPts val="800"/>
-              </a:spcAft>
-              <a:defRPr sz="2200" b="0">
-                <a:solidFill>
-                  <a:srgbClr val="222222"/>
-                </a:solidFill>
-                <a:latin typeface="Calibri"/>
-              </a:defRPr>
-            </a:pPr>
-            <a:r>
-              <a:t>Not model-based -- does not assume a specific model form</a:t>
-            </a:r>
-          </a:p>
-          <a:p>
-            <a:pPr>
-              <a:spcAft>
-                <a:spcPts val="800"/>
-              </a:spcAft>
-              <a:defRPr sz="2200" b="0">
-                <a:solidFill>
-                  <a:srgbClr val="222222"/>
-                </a:solidFill>
-                <a:latin typeface="Calibri"/>
-              </a:defRPr>
-            </a:pPr>
-            <a:r>
-              <a:t>Good for computer experiments and simulations</a:t>
-            </a:r>
-          </a:p>
-          <a:p>
-            <a:pPr>
-              <a:spcAft>
-                <a:spcPts val="800"/>
-              </a:spcAft>
-              <a:defRPr sz="2200" b="0">
-                <a:solidFill>
-                  <a:srgbClr val="222222"/>
-                </a:solidFill>
-                <a:latin typeface="Calibri"/>
-              </a:defRPr>
-            </a:pPr>
-            <a:r>
-              <a:t>User specifies the number of runs</a:t>
-            </a:r>
-          </a:p>
-          <a:p>
-            <a:pPr>
-              <a:spcAft>
-                <a:spcPts val="800"/>
-              </a:spcAft>
-              <a:defRPr sz="2200" b="0">
-                <a:solidFill>
-                  <a:srgbClr val="222222"/>
-                </a:solidFill>
-                <a:latin typeface="Calibri"/>
-              </a:defRPr>
-            </a:pPr>
-            <a:r>
-              <a:t>Each factor divided into N equal intervals, one sample per interval</a:t>
-            </a:r>
-          </a:p>
-          <a:p>
-            <a:pPr>
-              <a:spcAft>
-                <a:spcPts val="800"/>
-              </a:spcAft>
-              <a:defRPr sz="2200" b="0">
-                <a:solidFill>
-                  <a:srgbClr val="222222"/>
-                </a:solidFill>
-                <a:latin typeface="Calibri"/>
-              </a:defRPr>
-            </a:pPr>
-            <a:r>
-              <a:t>Complements DOE when the response surface is unknown</a:t>
-            </a:r>
-          </a:p>
-          <a:p>
-            <a:pPr>
-              <a:spcAft>
-                <a:spcPts val="800"/>
-              </a:spcAft>
-              <a:defRPr sz="2200" b="0">
-                <a:solidFill>
-                  <a:srgbClr val="222222"/>
-                </a:solidFill>
-                <a:latin typeface="Calibri"/>
-              </a:defRPr>
-            </a:pPr>
-            <a:r>
-              <a:t>doe-helper: set "type": "latin_hypercube", "runs": N</a:t>
+            <a:pPr algn="l">
+              <a:defRPr sz="1400" b="0">
+                <a:solidFill>
+                  <a:srgbClr val="666666"/>
+                </a:solidFill>
+                <a:latin typeface="Inter"/>
+              </a:defRPr>
+            </a:pPr>
+            <a:r>
+              <a:t>doe optimize uses scipy.optimize with multi-start for global search</a:t>
+            </a:r>
+          </a:p>
+        </p:txBody>
+      </p:sp>
+      <p:sp>
+        <p:nvSpPr>
+          <p:cNvPr id="8" name="TextBox 7"/>
+          <p:cNvSpPr txBox="1"/>
+          <p:nvPr/>
+        </p:nvSpPr>
+        <p:spPr>
+          <a:xfrm>
+            <a:off x="731520" y="6400800"/>
+            <a:ext cx="10058400" cy="365760"/>
+          </a:xfrm>
+          <a:prstGeom prst="rect">
+            <a:avLst/>
+          </a:prstGeom>
+          <a:noFill/>
+        </p:spPr>
+        <p:txBody>
+          <a:bodyPr wrap="square">
+            <a:spAutoFit/>
+          </a:bodyPr>
+          <a:lstStyle/>
+          <a:p>
+            <a:pPr algn="l">
+              <a:defRPr sz="1000" b="0">
+                <a:solidFill>
+                  <a:srgbClr val="999999"/>
+                </a:solidFill>
+                <a:latin typeface="Consolas"/>
+              </a:defRPr>
+            </a:pPr>
+            <a:r>
+              <a:t>© 2026 Martin J. Gallagher  |  GPL-3.0-or-later  |  doehelper.com</a:t>
             </a:r>
           </a:p>
         </p:txBody>
@@ -6103,7 +6800,7 @@
     <p:bg>
       <p:bgPr>
         <a:solidFill>
-          <a:srgbClr val="FFFFFF"/>
+          <a:srgbClr val="FAFAFA"/>
         </a:solidFill>
         <a:effectLst/>
       </p:bgPr>
@@ -6124,13 +6821,13 @@
         <p:spPr>
           <a:xfrm>
             <a:off x="0" y="0"/>
-            <a:ext cx="12191695" cy="54864"/>
+            <a:ext cx="12191695" cy="45720"/>
           </a:xfrm>
           <a:prstGeom prst="rect">
             <a:avLst/>
           </a:prstGeom>
           <a:solidFill>
-            <a:srgbClr val="007BFF"/>
+            <a:srgbClr val="5046E5"/>
           </a:solidFill>
           <a:ln>
             <a:noFill/>
@@ -6160,14 +6857,57 @@
       </p:sp>
       <p:sp>
         <p:nvSpPr>
-          <p:cNvPr id="3" name="TextBox 2"/>
+          <p:cNvPr id="3" name="Rectangle 2"/>
+          <p:cNvSpPr/>
+          <p:nvPr/>
+        </p:nvSpPr>
+        <p:spPr>
+          <a:xfrm>
+            <a:off x="548640" y="411480"/>
+            <a:ext cx="36576" cy="502920"/>
+          </a:xfrm>
+          <a:prstGeom prst="rect">
+            <a:avLst/>
+          </a:prstGeom>
+          <a:solidFill>
+            <a:srgbClr val="5046E5"/>
+          </a:solidFill>
+          <a:ln>
+            <a:noFill/>
+          </a:ln>
+        </p:spPr>
+        <p:style>
+          <a:lnRef idx="1">
+            <a:schemeClr val="accent1"/>
+          </a:lnRef>
+          <a:fillRef idx="3">
+            <a:schemeClr val="accent1"/>
+          </a:fillRef>
+          <a:effectRef idx="2">
+            <a:schemeClr val="accent1"/>
+          </a:effectRef>
+          <a:fontRef idx="minor">
+            <a:schemeClr val="lt1"/>
+          </a:fontRef>
+        </p:style>
+        <p:txBody>
+          <a:bodyPr rtlCol="0" anchor="ctr"/>
+          <a:lstStyle/>
+          <a:p>
+            <a:pPr algn="ctr"/>
+          </a:p>
+        </p:txBody>
+      </p:sp>
+      <p:sp>
+        <p:nvSpPr>
+          <p:cNvPr id="4" name="TextBox 3"/>
           <p:cNvSpPr txBox="1"/>
           <p:nvPr/>
         </p:nvSpPr>
         <p:spPr>
           <a:xfrm>
-            <a:off x="731520" y="365760"/>
-            <a:ext cx="10515600" cy="822960"/>
+            <a:off x="777240" y="365760"/>
+            <a:ext cx="10058400" cy="640080"/>
           </a:xfrm>
           <a:prstGeom prst="rect">
             <a:avLst/>
@@ -6180,30 +6920,30 @@
           </a:bodyPr>
           <a:lstStyle/>
           <a:p>
-            <a:pPr>
-              <a:defRPr sz="3200" b="1">
-                <a:solidFill>
-                  <a:srgbClr val="222222"/>
-                </a:solidFill>
-                <a:latin typeface="Calibri"/>
-              </a:defRPr>
-            </a:pPr>
-            <a:r>
-              <a:t>Interpreting Surface Plots</a:t>
-            </a:r>
-          </a:p>
-        </p:txBody>
-      </p:sp>
-      <p:sp>
-        <p:nvSpPr>
-          <p:cNvPr id="4" name="TextBox 3"/>
+            <a:pPr algn="l">
+              <a:defRPr sz="2800" b="1">
+                <a:solidFill>
+                  <a:srgbClr val="111111"/>
+                </a:solidFill>
+                <a:latin typeface="Inter"/>
+              </a:defRPr>
+            </a:pPr>
+            <a:r>
+              <a:t>Steepest Ascent / Descent</a:t>
+            </a:r>
+          </a:p>
+        </p:txBody>
+      </p:sp>
+      <p:sp>
+        <p:nvSpPr>
+          <p:cNvPr id="5" name="TextBox 4"/>
           <p:cNvSpPr txBox="1"/>
           <p:nvPr/>
         </p:nvSpPr>
         <p:spPr>
           <a:xfrm>
-            <a:off x="914400" y="1463040"/>
-            <a:ext cx="10058400" cy="4754880"/>
+            <a:off x="822960" y="1188720"/>
+            <a:ext cx="10241280" cy="5120640"/>
           </a:xfrm>
           <a:prstGeom prst="rect">
             <a:avLst/>
@@ -6218,129 +6958,149 @@
           <a:p>
             <a:pPr>
               <a:spcAft>
-                <a:spcPts val="800"/>
-              </a:spcAft>
-              <a:defRPr sz="2200" b="0">
-                <a:solidFill>
-                  <a:srgbClr val="222222"/>
-                </a:solidFill>
-                <a:latin typeface="Calibri"/>
-              </a:defRPr>
-            </a:pPr>
-            <a:r>
-              <a:t>3D surface plots show response as a function of two factors</a:t>
+                <a:spcPts val="600"/>
+              </a:spcAft>
+              <a:defRPr sz="1900">
+                <a:solidFill>
+                  <a:srgbClr val="333333"/>
+                </a:solidFill>
+                <a:latin typeface="Inter"/>
+              </a:defRPr>
+            </a:pPr>
+            <a:r>
+              <a:t>Sequential experimentation strategy:</a:t>
+            </a:r>
+          </a:p>
+          <a:p>
+            <a:pPr lvl="1">
+              <a:spcAft>
+                <a:spcPts val="600"/>
+              </a:spcAft>
+              <a:defRPr sz="1700">
+                <a:solidFill>
+                  <a:srgbClr val="666666"/>
+                </a:solidFill>
+                <a:latin typeface="Inter"/>
+              </a:defRPr>
+            </a:pPr>
+            <a:r>
+              <a:t>Start with factorial near current operating settings</a:t>
+            </a:r>
+          </a:p>
+          <a:p>
+            <a:pPr lvl="1">
+              <a:spcAft>
+                <a:spcPts val="600"/>
+              </a:spcAft>
+              <a:defRPr sz="1700">
+                <a:solidFill>
+                  <a:srgbClr val="666666"/>
+                </a:solidFill>
+                <a:latin typeface="Inter"/>
+              </a:defRPr>
+            </a:pPr>
+            <a:r>
+              <a:t>Fit a linear model to identify the steepest ascent direction</a:t>
+            </a:r>
+          </a:p>
+          <a:p>
+            <a:pPr lvl="1">
+              <a:spcAft>
+                <a:spcPts val="600"/>
+              </a:spcAft>
+              <a:defRPr sz="1700">
+                <a:solidFill>
+                  <a:srgbClr val="666666"/>
+                </a:solidFill>
+                <a:latin typeface="Inter"/>
+              </a:defRPr>
+            </a:pPr>
+            <a:r>
+              <a:t>Run experiments along this path until response plateaus</a:t>
+            </a:r>
+          </a:p>
+          <a:p>
+            <a:pPr lvl="1">
+              <a:spcAft>
+                <a:spcPts val="600"/>
+              </a:spcAft>
+              <a:defRPr sz="1700">
+                <a:solidFill>
+                  <a:srgbClr val="666666"/>
+                </a:solidFill>
+                <a:latin typeface="Inter"/>
+              </a:defRPr>
+            </a:pPr>
+            <a:r>
+              <a:t>Run a new RSM design at the plateau</a:t>
             </a:r>
           </a:p>
           <a:p>
             <a:pPr>
               <a:spcAft>
-                <a:spcPts val="800"/>
-              </a:spcAft>
-              <a:defRPr sz="2200" b="0">
-                <a:solidFill>
-                  <a:srgbClr val="222222"/>
-                </a:solidFill>
-                <a:latin typeface="Calibri"/>
-              </a:defRPr>
-            </a:pPr>
-            <a:r>
-              <a:t>Contour plots show the same information as a 2D map</a:t>
+                <a:spcPts val="600"/>
+              </a:spcAft>
+              <a:defRPr sz="1900">
+                <a:solidFill>
+                  <a:srgbClr val="333333"/>
+                </a:solidFill>
+                <a:latin typeface="Inter"/>
+              </a:defRPr>
+            </a:pPr>
+            <a:r>
+              <a:t>doe-helper computes the steepest ascent path automatically</a:t>
             </a:r>
           </a:p>
           <a:p>
             <a:pPr>
               <a:spcAft>
-                <a:spcPts val="800"/>
-              </a:spcAft>
-              <a:defRPr sz="2200" b="0">
-                <a:solidFill>
-                  <a:srgbClr val="222222"/>
-                </a:solidFill>
-                <a:latin typeface="Calibri"/>
-              </a:defRPr>
-            </a:pPr>
-            <a:r>
-              <a:t>Look for:</a:t>
-            </a:r>
-          </a:p>
-          <a:p>
-            <a:pPr lvl="1">
-              <a:spcAft>
-                <a:spcPts val="800"/>
+                <a:spcPts val="600"/>
               </a:spcAft>
               <a:defRPr sz="1900">
                 <a:solidFill>
-                  <a:srgbClr val="222222"/>
-                </a:solidFill>
-                <a:latin typeface="Calibri"/>
-              </a:defRPr>
-            </a:pPr>
-            <a:r>
-              <a:t>Peaks/valleys: where the optimum lies</a:t>
-            </a:r>
-          </a:p>
-          <a:p>
-            <a:pPr lvl="1">
-              <a:spcAft>
-                <a:spcPts val="800"/>
-              </a:spcAft>
-              <a:defRPr sz="1900">
-                <a:solidFill>
-                  <a:srgbClr val="222222"/>
-                </a:solidFill>
-                <a:latin typeface="Calibri"/>
-              </a:defRPr>
-            </a:pPr>
-            <a:r>
-              <a:t>Ridges: elongated regions of near-optimal response</a:t>
-            </a:r>
-          </a:p>
-          <a:p>
-            <a:pPr lvl="1">
-              <a:spcAft>
-                <a:spcPts val="800"/>
-              </a:spcAft>
-              <a:defRPr sz="1900">
-                <a:solidFill>
-                  <a:srgbClr val="222222"/>
-                </a:solidFill>
-                <a:latin typeface="Calibri"/>
-              </a:defRPr>
-            </a:pPr>
-            <a:r>
-              <a:t>Saddle points: optimum in one direction, pessimum in another</a:t>
-            </a:r>
-          </a:p>
-          <a:p>
-            <a:pPr>
-              <a:spcAft>
-                <a:spcPts val="800"/>
-              </a:spcAft>
-              <a:defRPr sz="2200" b="0">
-                <a:solidFill>
-                  <a:srgbClr val="222222"/>
-                </a:solidFill>
-                <a:latin typeface="Calibri"/>
-              </a:defRPr>
-            </a:pPr>
-            <a:r>
-              <a:t>doe-helper generates these automatically in reports</a:t>
-            </a:r>
-          </a:p>
-          <a:p>
-            <a:pPr lvl="1">
-              <a:spcAft>
-                <a:spcPts val="800"/>
-              </a:spcAft>
-              <a:defRPr sz="1900">
-                <a:solidFill>
-                  <a:srgbClr val="222222"/>
-                </a:solidFill>
-                <a:latin typeface="Calibri"/>
-              </a:defRPr>
-            </a:pPr>
-            <a:r>
-              <a:t>doe report experiment/ produces an interactive HTML report</a:t>
+                  <a:srgbClr val="333333"/>
+                </a:solidFill>
+                <a:latin typeface="Inter"/>
+              </a:defRPr>
+            </a:pPr>
+            <a:r>
+              <a:t>Efficient when you're far from the optimum</a:t>
+            </a:r>
+          </a:p>
+        </p:txBody>
+      </p:sp>
+      <p:sp>
+        <p:nvSpPr>
+          <p:cNvPr id="6" name="TextBox 5"/>
+          <p:cNvSpPr txBox="1"/>
+          <p:nvPr/>
+        </p:nvSpPr>
+        <p:spPr>
+          <a:xfrm>
+            <a:off x="731520" y="6400800"/>
+            <a:ext cx="10058400" cy="365760"/>
+          </a:xfrm>
+          <a:prstGeom prst="rect">
+            <a:avLst/>
+          </a:prstGeom>
+          <a:noFill/>
+        </p:spPr>
+        <p:txBody>
+          <a:bodyPr wrap="square">
+            <a:spAutoFit/>
+          </a:bodyPr>
+          <a:lstStyle/>
+          <a:p>
+            <a:pPr algn="l">
+              <a:defRPr sz="1000" b="0">
+                <a:solidFill>
+                  <a:srgbClr val="999999"/>
+                </a:solidFill>
+                <a:latin typeface="Consolas"/>
+              </a:defRPr>
+            </a:pPr>
+            <a:r>
+              <a:t>© 2026 Martin J. Gallagher  |  GPL-3.0-or-later  |  doehelper.com</a:t>
             </a:r>
           </a:p>
         </p:txBody>
@@ -6359,7 +7119,7 @@
     <p:bg>
       <p:bgPr>
         <a:solidFill>
-          <a:srgbClr val="FFFFFF"/>
+          <a:srgbClr val="1E1B4B"/>
         </a:solidFill>
         <a:effectLst/>
       </p:bgPr>
@@ -6379,14 +7139,14 @@
         </p:nvSpPr>
         <p:spPr>
           <a:xfrm>
-            <a:off x="0" y="0"/>
-            <a:ext cx="12191695" cy="54864"/>
+            <a:off x="3657600" y="0"/>
+            <a:ext cx="4572000" cy="6858000"/>
           </a:xfrm>
           <a:prstGeom prst="rect">
             <a:avLst/>
           </a:prstGeom>
           <a:solidFill>
-            <a:srgbClr val="00C853"/>
+            <a:srgbClr val="312E81"/>
           </a:solidFill>
           <a:ln>
             <a:noFill/>
@@ -6416,56 +7176,20 @@
       </p:sp>
       <p:sp>
         <p:nvSpPr>
-          <p:cNvPr id="3" name="TextBox 2"/>
-          <p:cNvSpPr txBox="1"/>
-          <p:nvPr/>
-        </p:nvSpPr>
-        <p:spPr>
-          <a:xfrm>
-            <a:off x="731520" y="365760"/>
-            <a:ext cx="10515600" cy="822960"/>
-          </a:xfrm>
-          <a:prstGeom prst="rect">
-            <a:avLst/>
-          </a:prstGeom>
-          <a:noFill/>
-        </p:spPr>
-        <p:txBody>
-          <a:bodyPr wrap="square">
-            <a:spAutoFit/>
-          </a:bodyPr>
-          <a:lstStyle/>
-          <a:p>
-            <a:pPr>
-              <a:defRPr sz="3000" b="1">
-                <a:solidFill>
-                  <a:srgbClr val="222222"/>
-                </a:solidFill>
-                <a:latin typeface="Calibri"/>
-              </a:defRPr>
-            </a:pPr>
-            <a:r>
-              <a:t>Optimization with doe-helper</a:t>
-            </a:r>
-          </a:p>
-        </p:txBody>
-      </p:sp>
-      <p:sp>
-        <p:nvSpPr>
-          <p:cNvPr id="4" name="Rounded Rectangle 3"/>
+          <p:cNvPr id="3" name="Rectangle 2"/>
           <p:cNvSpPr/>
           <p:nvPr/>
         </p:nvSpPr>
         <p:spPr>
           <a:xfrm>
-            <a:off x="731520" y="1371600"/>
-            <a:ext cx="10515600" cy="4114800"/>
-          </a:xfrm>
-          <a:prstGeom prst="roundRect">
+            <a:off x="8229600" y="0"/>
+            <a:ext cx="3962095" cy="6858000"/>
+          </a:xfrm>
+          <a:prstGeom prst="rect">
             <a:avLst/>
           </a:prstGeom>
           <a:solidFill>
-            <a:srgbClr val="2D2D2D"/>
+            <a:srgbClr val="4338CA"/>
           </a:solidFill>
           <a:ln>
             <a:noFill/>
@@ -6486,264 +7210,23 @@
           </a:fontRef>
         </p:style>
         <p:txBody>
-          <a:bodyPr rtlCol="0" anchor="ctr" wrap="square" lIns="274320" tIns="274320"/>
-          <a:lstStyle/>
-          <a:p>
-            <a:pPr algn="ctr">
-              <a:spcAft>
-                <a:spcPts val="200"/>
-              </a:spcAft>
-              <a:defRPr sz="1800">
-                <a:solidFill>
-                  <a:srgbClr val="D4D4D4"/>
-                </a:solidFill>
-                <a:latin typeface="Consolas"/>
-              </a:defRPr>
-            </a:pPr>
-            <a:r>
-              <a:t># After recording results and running analysis:</a:t>
-            </a:r>
-          </a:p>
-          <a:p>
-            <a:pPr>
-              <a:spcAft>
-                <a:spcPts val="200"/>
-              </a:spcAft>
-              <a:defRPr sz="1800">
-                <a:solidFill>
-                  <a:srgbClr val="D4D4D4"/>
-                </a:solidFill>
-                <a:latin typeface="Consolas"/>
-              </a:defRPr>
-            </a:pPr>
-            <a:r>
-              <a:t>$ doe optimize reactor_rsm/</a:t>
-            </a:r>
-          </a:p>
-          <a:p>
-            <a:pPr>
-              <a:spcAft>
-                <a:spcPts val="200"/>
-              </a:spcAft>
-              <a:defRPr sz="1800">
-                <a:solidFill>
-                  <a:srgbClr val="D4D4D4"/>
-                </a:solidFill>
-                <a:latin typeface="Consolas"/>
-              </a:defRPr>
-            </a:pPr>
-          </a:p>
-          <a:p>
-            <a:pPr>
-              <a:spcAft>
-                <a:spcPts val="200"/>
-              </a:spcAft>
-              <a:defRPr sz="1800">
-                <a:solidFill>
-                  <a:srgbClr val="D4D4D4"/>
-                </a:solidFill>
-                <a:latin typeface="Consolas"/>
-              </a:defRPr>
-            </a:pPr>
-            <a:r>
-              <a:t>Optimization Results</a:t>
-            </a:r>
-          </a:p>
-          <a:p>
-            <a:pPr>
-              <a:spcAft>
-                <a:spcPts val="200"/>
-              </a:spcAft>
-              <a:defRPr sz="1800">
-                <a:solidFill>
-                  <a:srgbClr val="D4D4D4"/>
-                </a:solidFill>
-                <a:latin typeface="Consolas"/>
-              </a:defRPr>
-            </a:pPr>
-            <a:r>
-              <a:t>  Method: L-BFGS-B with 20 random restarts</a:t>
-            </a:r>
-          </a:p>
-          <a:p>
-            <a:pPr>
-              <a:spcAft>
-                <a:spcPts val="200"/>
-              </a:spcAft>
-              <a:defRPr sz="1800">
-                <a:solidFill>
-                  <a:srgbClr val="D4D4D4"/>
-                </a:solidFill>
-                <a:latin typeface="Consolas"/>
-              </a:defRPr>
-            </a:pPr>
-          </a:p>
-          <a:p>
-            <a:pPr>
-              <a:spcAft>
-                <a:spcPts val="200"/>
-              </a:spcAft>
-              <a:defRPr sz="1800">
-                <a:solidFill>
-                  <a:srgbClr val="D4D4D4"/>
-                </a:solidFill>
-                <a:latin typeface="Consolas"/>
-              </a:defRPr>
-            </a:pPr>
-            <a:r>
-              <a:t>  Optimal Settings:</a:t>
-            </a:r>
-          </a:p>
-          <a:p>
-            <a:pPr>
-              <a:spcAft>
-                <a:spcPts val="200"/>
-              </a:spcAft>
-              <a:defRPr sz="1800">
-                <a:solidFill>
-                  <a:srgbClr val="D4D4D4"/>
-                </a:solidFill>
-                <a:latin typeface="Consolas"/>
-              </a:defRPr>
-            </a:pPr>
-            <a:r>
-              <a:t>    temperature: 182.3 C</a:t>
-            </a:r>
-          </a:p>
-          <a:p>
-            <a:pPr>
-              <a:spcAft>
-                <a:spcPts val="200"/>
-              </a:spcAft>
-              <a:defRPr sz="1800">
-                <a:solidFill>
-                  <a:srgbClr val="D4D4D4"/>
-                </a:solidFill>
-                <a:latin typeface="Consolas"/>
-              </a:defRPr>
-            </a:pPr>
-            <a:r>
-              <a:t>    pressure:    3.8 bar</a:t>
-            </a:r>
-          </a:p>
-          <a:p>
-            <a:pPr>
-              <a:spcAft>
-                <a:spcPts val="200"/>
-              </a:spcAft>
-              <a:defRPr sz="1800">
-                <a:solidFill>
-                  <a:srgbClr val="D4D4D4"/>
-                </a:solidFill>
-                <a:latin typeface="Consolas"/>
-              </a:defRPr>
-            </a:pPr>
-            <a:r>
-              <a:t>    catalyst:    1.2 g</a:t>
-            </a:r>
-          </a:p>
-          <a:p>
-            <a:pPr>
-              <a:spcAft>
-                <a:spcPts val="200"/>
-              </a:spcAft>
-              <a:defRPr sz="1800">
-                <a:solidFill>
-                  <a:srgbClr val="D4D4D4"/>
-                </a:solidFill>
-                <a:latin typeface="Consolas"/>
-              </a:defRPr>
-            </a:pPr>
-          </a:p>
-          <a:p>
-            <a:pPr>
-              <a:spcAft>
-                <a:spcPts val="200"/>
-              </a:spcAft>
-              <a:defRPr sz="1800">
-                <a:solidFill>
-                  <a:srgbClr val="D4D4D4"/>
-                </a:solidFill>
-                <a:latin typeface="Consolas"/>
-              </a:defRPr>
-            </a:pPr>
-            <a:r>
-              <a:t>  Predicted Responses:</a:t>
-            </a:r>
-          </a:p>
-          <a:p>
-            <a:pPr>
-              <a:spcAft>
-                <a:spcPts val="200"/>
-              </a:spcAft>
-              <a:defRPr sz="1800">
-                <a:solidFill>
-                  <a:srgbClr val="D4D4D4"/>
-                </a:solidFill>
-                <a:latin typeface="Consolas"/>
-              </a:defRPr>
-            </a:pPr>
-            <a:r>
-              <a:t>    yield:  94.2%  (target: maximize)</a:t>
-            </a:r>
-          </a:p>
-          <a:p>
-            <a:pPr>
-              <a:spcAft>
-                <a:spcPts val="200"/>
-              </a:spcAft>
-              <a:defRPr sz="1800">
-                <a:solidFill>
-                  <a:srgbClr val="D4D4D4"/>
-                </a:solidFill>
-                <a:latin typeface="Consolas"/>
-              </a:defRPr>
-            </a:pPr>
-            <a:r>
-              <a:t>    purity: 98.7%  (target: maximize)</a:t>
-            </a:r>
-          </a:p>
-          <a:p>
-            <a:pPr>
-              <a:spcAft>
-                <a:spcPts val="200"/>
-              </a:spcAft>
-              <a:defRPr sz="1800">
-                <a:solidFill>
-                  <a:srgbClr val="D4D4D4"/>
-                </a:solidFill>
-                <a:latin typeface="Consolas"/>
-              </a:defRPr>
-            </a:pPr>
-          </a:p>
-          <a:p>
-            <a:pPr>
-              <a:spcAft>
-                <a:spcPts val="200"/>
-              </a:spcAft>
-              <a:defRPr sz="1800">
-                <a:solidFill>
-                  <a:srgbClr val="D4D4D4"/>
-                </a:solidFill>
-                <a:latin typeface="Consolas"/>
-              </a:defRPr>
-            </a:pPr>
-            <a:r>
-              <a:t>  Desirability: 0.93</a:t>
-            </a:r>
-          </a:p>
-        </p:txBody>
-      </p:sp>
-      <p:sp>
-        <p:nvSpPr>
-          <p:cNvPr id="5" name="TextBox 4"/>
+          <a:bodyPr rtlCol="0" anchor="ctr"/>
+          <a:lstStyle/>
+          <a:p>
+            <a:pPr algn="ctr"/>
+          </a:p>
+        </p:txBody>
+      </p:sp>
+      <p:sp>
+        <p:nvSpPr>
+          <p:cNvPr id="4" name="TextBox 3"/>
           <p:cNvSpPr txBox="1"/>
           <p:nvPr/>
         </p:nvSpPr>
         <p:spPr>
           <a:xfrm>
-            <a:off x="731520" y="5760720"/>
-            <a:ext cx="10058400" cy="731520"/>
+            <a:off x="731520" y="365760"/>
+            <a:ext cx="10058400" cy="640080"/>
           </a:xfrm>
           <a:prstGeom prst="rect">
             <a:avLst/>
@@ -6756,16 +7239,662 @@
           </a:bodyPr>
           <a:lstStyle/>
           <a:p>
-            <a:pPr>
-              <a:defRPr sz="1600" i="1">
-                <a:solidFill>
-                  <a:srgbClr val="666666"/>
-                </a:solidFill>
-                <a:latin typeface="Calibri"/>
-              </a:defRPr>
-            </a:pPr>
-            <a:r>
-              <a:t>doe optimize uses scipy.optimize with multi-start for global search</a:t>
+            <a:pPr algn="l">
+              <a:defRPr sz="3000" b="1">
+                <a:solidFill>
+                  <a:srgbClr val="FFFFFF"/>
+                </a:solidFill>
+                <a:latin typeface="Inter"/>
+              </a:defRPr>
+            </a:pPr>
+            <a:r>
+              <a:t>Key Takeaways</a:t>
+            </a:r>
+          </a:p>
+        </p:txBody>
+      </p:sp>
+      <p:sp>
+        <p:nvSpPr>
+          <p:cNvPr id="5" name="Rounded Rectangle 4"/>
+          <p:cNvSpPr/>
+          <p:nvPr/>
+        </p:nvSpPr>
+        <p:spPr>
+          <a:xfrm>
+            <a:off x="731520" y="1280160"/>
+            <a:ext cx="10515600" cy="777240"/>
+          </a:xfrm>
+          <a:prstGeom prst="roundRect">
+            <a:avLst/>
+          </a:prstGeom>
+          <a:solidFill>
+            <a:srgbClr val="312E81"/>
+          </a:solidFill>
+          <a:ln>
+            <a:noFill/>
+          </a:ln>
+        </p:spPr>
+        <p:style>
+          <a:lnRef idx="1">
+            <a:schemeClr val="accent1"/>
+          </a:lnRef>
+          <a:fillRef idx="3">
+            <a:schemeClr val="accent1"/>
+          </a:fillRef>
+          <a:effectRef idx="2">
+            <a:schemeClr val="accent1"/>
+          </a:effectRef>
+          <a:fontRef idx="minor">
+            <a:schemeClr val="lt1"/>
+          </a:fontRef>
+        </p:style>
+        <p:txBody>
+          <a:bodyPr rtlCol="0" anchor="ctr"/>
+          <a:lstStyle/>
+          <a:p>
+            <a:pPr algn="ctr"/>
+          </a:p>
+        </p:txBody>
+      </p:sp>
+      <p:sp>
+        <p:nvSpPr>
+          <p:cNvPr id="6" name="Oval 5"/>
+          <p:cNvSpPr/>
+          <p:nvPr/>
+        </p:nvSpPr>
+        <p:spPr>
+          <a:xfrm>
+            <a:off x="1005840" y="1508760"/>
+            <a:ext cx="320040" cy="320040"/>
+          </a:xfrm>
+          <a:prstGeom prst="ellipse">
+            <a:avLst/>
+          </a:prstGeom>
+          <a:solidFill>
+            <a:srgbClr val="5046E5"/>
+          </a:solidFill>
+          <a:ln>
+            <a:noFill/>
+          </a:ln>
+        </p:spPr>
+        <p:style>
+          <a:lnRef idx="1">
+            <a:schemeClr val="accent1"/>
+          </a:lnRef>
+          <a:fillRef idx="3">
+            <a:schemeClr val="accent1"/>
+          </a:fillRef>
+          <a:effectRef idx="2">
+            <a:schemeClr val="accent1"/>
+          </a:effectRef>
+          <a:fontRef idx="minor">
+            <a:schemeClr val="lt1"/>
+          </a:fontRef>
+        </p:style>
+        <p:txBody>
+          <a:bodyPr rtlCol="0" anchor="ctr"/>
+          <a:lstStyle/>
+          <a:p>
+            <a:pPr algn="ctr"/>
+          </a:p>
+        </p:txBody>
+      </p:sp>
+      <p:sp>
+        <p:nvSpPr>
+          <p:cNvPr id="7" name="TextBox 6"/>
+          <p:cNvSpPr txBox="1"/>
+          <p:nvPr/>
+        </p:nvSpPr>
+        <p:spPr>
+          <a:xfrm>
+            <a:off x="1554480" y="1325880"/>
+            <a:ext cx="9418320" cy="777240"/>
+          </a:xfrm>
+          <a:prstGeom prst="rect">
+            <a:avLst/>
+          </a:prstGeom>
+          <a:noFill/>
+        </p:spPr>
+        <p:txBody>
+          <a:bodyPr wrap="square" anchor="ctr">
+            <a:spAutoFit/>
+          </a:bodyPr>
+          <a:lstStyle/>
+          <a:p>
+            <a:pPr algn="l">
+              <a:defRPr sz="1800" b="0">
+                <a:solidFill>
+                  <a:srgbClr val="FFFFFF"/>
+                </a:solidFill>
+                <a:latin typeface="Inter"/>
+              </a:defRPr>
+            </a:pPr>
+            <a:r>
+              <a:t>RSM fits quadratic models to find optima</a:t>
+            </a:r>
+          </a:p>
+        </p:txBody>
+      </p:sp>
+      <p:sp>
+        <p:nvSpPr>
+          <p:cNvPr id="8" name="Rounded Rectangle 7"/>
+          <p:cNvSpPr/>
+          <p:nvPr/>
+        </p:nvSpPr>
+        <p:spPr>
+          <a:xfrm>
+            <a:off x="731520" y="2167128"/>
+            <a:ext cx="10515600" cy="777240"/>
+          </a:xfrm>
+          <a:prstGeom prst="roundRect">
+            <a:avLst/>
+          </a:prstGeom>
+          <a:solidFill>
+            <a:srgbClr val="312E81"/>
+          </a:solidFill>
+          <a:ln>
+            <a:noFill/>
+          </a:ln>
+        </p:spPr>
+        <p:style>
+          <a:lnRef idx="1">
+            <a:schemeClr val="accent1"/>
+          </a:lnRef>
+          <a:fillRef idx="3">
+            <a:schemeClr val="accent1"/>
+          </a:fillRef>
+          <a:effectRef idx="2">
+            <a:schemeClr val="accent1"/>
+          </a:effectRef>
+          <a:fontRef idx="minor">
+            <a:schemeClr val="lt1"/>
+          </a:fontRef>
+        </p:style>
+        <p:txBody>
+          <a:bodyPr rtlCol="0" anchor="ctr"/>
+          <a:lstStyle/>
+          <a:p>
+            <a:pPr algn="ctr"/>
+          </a:p>
+        </p:txBody>
+      </p:sp>
+      <p:sp>
+        <p:nvSpPr>
+          <p:cNvPr id="9" name="Oval 8"/>
+          <p:cNvSpPr/>
+          <p:nvPr/>
+        </p:nvSpPr>
+        <p:spPr>
+          <a:xfrm>
+            <a:off x="1005840" y="2395728"/>
+            <a:ext cx="320040" cy="320040"/>
+          </a:xfrm>
+          <a:prstGeom prst="ellipse">
+            <a:avLst/>
+          </a:prstGeom>
+          <a:solidFill>
+            <a:srgbClr val="5046E5"/>
+          </a:solidFill>
+          <a:ln>
+            <a:noFill/>
+          </a:ln>
+        </p:spPr>
+        <p:style>
+          <a:lnRef idx="1">
+            <a:schemeClr val="accent1"/>
+          </a:lnRef>
+          <a:fillRef idx="3">
+            <a:schemeClr val="accent1"/>
+          </a:fillRef>
+          <a:effectRef idx="2">
+            <a:schemeClr val="accent1"/>
+          </a:effectRef>
+          <a:fontRef idx="minor">
+            <a:schemeClr val="lt1"/>
+          </a:fontRef>
+        </p:style>
+        <p:txBody>
+          <a:bodyPr rtlCol="0" anchor="ctr"/>
+          <a:lstStyle/>
+          <a:p>
+            <a:pPr algn="ctr"/>
+          </a:p>
+        </p:txBody>
+      </p:sp>
+      <p:sp>
+        <p:nvSpPr>
+          <p:cNvPr id="10" name="TextBox 9"/>
+          <p:cNvSpPr txBox="1"/>
+          <p:nvPr/>
+        </p:nvSpPr>
+        <p:spPr>
+          <a:xfrm>
+            <a:off x="1554480" y="2212848"/>
+            <a:ext cx="9418320" cy="777240"/>
+          </a:xfrm>
+          <a:prstGeom prst="rect">
+            <a:avLst/>
+          </a:prstGeom>
+          <a:noFill/>
+        </p:spPr>
+        <p:txBody>
+          <a:bodyPr wrap="square" anchor="ctr">
+            <a:spAutoFit/>
+          </a:bodyPr>
+          <a:lstStyle/>
+          <a:p>
+            <a:pPr algn="l">
+              <a:defRPr sz="1800" b="0">
+                <a:solidFill>
+                  <a:srgbClr val="FFFFFF"/>
+                </a:solidFill>
+                <a:latin typeface="Inter"/>
+              </a:defRPr>
+            </a:pPr>
+            <a:r>
+              <a:t>CCD is the workhorse; Box-Behnken avoids extremes</a:t>
+            </a:r>
+          </a:p>
+        </p:txBody>
+      </p:sp>
+      <p:sp>
+        <p:nvSpPr>
+          <p:cNvPr id="11" name="Rounded Rectangle 10"/>
+          <p:cNvSpPr/>
+          <p:nvPr/>
+        </p:nvSpPr>
+        <p:spPr>
+          <a:xfrm>
+            <a:off x="731520" y="3054096"/>
+            <a:ext cx="10515600" cy="777240"/>
+          </a:xfrm>
+          <a:prstGeom prst="roundRect">
+            <a:avLst/>
+          </a:prstGeom>
+          <a:solidFill>
+            <a:srgbClr val="312E81"/>
+          </a:solidFill>
+          <a:ln>
+            <a:noFill/>
+          </a:ln>
+        </p:spPr>
+        <p:style>
+          <a:lnRef idx="1">
+            <a:schemeClr val="accent1"/>
+          </a:lnRef>
+          <a:fillRef idx="3">
+            <a:schemeClr val="accent1"/>
+          </a:fillRef>
+          <a:effectRef idx="2">
+            <a:schemeClr val="accent1"/>
+          </a:effectRef>
+          <a:fontRef idx="minor">
+            <a:schemeClr val="lt1"/>
+          </a:fontRef>
+        </p:style>
+        <p:txBody>
+          <a:bodyPr rtlCol="0" anchor="ctr"/>
+          <a:lstStyle/>
+          <a:p>
+            <a:pPr algn="ctr"/>
+          </a:p>
+        </p:txBody>
+      </p:sp>
+      <p:sp>
+        <p:nvSpPr>
+          <p:cNvPr id="12" name="Oval 11"/>
+          <p:cNvSpPr/>
+          <p:nvPr/>
+        </p:nvSpPr>
+        <p:spPr>
+          <a:xfrm>
+            <a:off x="1005840" y="3282696"/>
+            <a:ext cx="320040" cy="320040"/>
+          </a:xfrm>
+          <a:prstGeom prst="ellipse">
+            <a:avLst/>
+          </a:prstGeom>
+          <a:solidFill>
+            <a:srgbClr val="5046E5"/>
+          </a:solidFill>
+          <a:ln>
+            <a:noFill/>
+          </a:ln>
+        </p:spPr>
+        <p:style>
+          <a:lnRef idx="1">
+            <a:schemeClr val="accent1"/>
+          </a:lnRef>
+          <a:fillRef idx="3">
+            <a:schemeClr val="accent1"/>
+          </a:fillRef>
+          <a:effectRef idx="2">
+            <a:schemeClr val="accent1"/>
+          </a:effectRef>
+          <a:fontRef idx="minor">
+            <a:schemeClr val="lt1"/>
+          </a:fontRef>
+        </p:style>
+        <p:txBody>
+          <a:bodyPr rtlCol="0" anchor="ctr"/>
+          <a:lstStyle/>
+          <a:p>
+            <a:pPr algn="ctr"/>
+          </a:p>
+        </p:txBody>
+      </p:sp>
+      <p:sp>
+        <p:nvSpPr>
+          <p:cNvPr id="13" name="TextBox 12"/>
+          <p:cNvSpPr txBox="1"/>
+          <p:nvPr/>
+        </p:nvSpPr>
+        <p:spPr>
+          <a:xfrm>
+            <a:off x="1554480" y="3099816"/>
+            <a:ext cx="9418320" cy="777240"/>
+          </a:xfrm>
+          <a:prstGeom prst="rect">
+            <a:avLst/>
+          </a:prstGeom>
+          <a:noFill/>
+        </p:spPr>
+        <p:txBody>
+          <a:bodyPr wrap="square" anchor="ctr">
+            <a:spAutoFit/>
+          </a:bodyPr>
+          <a:lstStyle/>
+          <a:p>
+            <a:pPr algn="l">
+              <a:defRPr sz="1800" b="0">
+                <a:solidFill>
+                  <a:srgbClr val="FFFFFF"/>
+                </a:solidFill>
+                <a:latin typeface="Inter"/>
+              </a:defRPr>
+            </a:pPr>
+            <a:r>
+              <a:t>LHS for space-filling when the model is unknown</a:t>
+            </a:r>
+          </a:p>
+        </p:txBody>
+      </p:sp>
+      <p:sp>
+        <p:nvSpPr>
+          <p:cNvPr id="14" name="Rounded Rectangle 13"/>
+          <p:cNvSpPr/>
+          <p:nvPr/>
+        </p:nvSpPr>
+        <p:spPr>
+          <a:xfrm>
+            <a:off x="731520" y="3941064"/>
+            <a:ext cx="10515600" cy="777240"/>
+          </a:xfrm>
+          <a:prstGeom prst="roundRect">
+            <a:avLst/>
+          </a:prstGeom>
+          <a:solidFill>
+            <a:srgbClr val="312E81"/>
+          </a:solidFill>
+          <a:ln>
+            <a:noFill/>
+          </a:ln>
+        </p:spPr>
+        <p:style>
+          <a:lnRef idx="1">
+            <a:schemeClr val="accent1"/>
+          </a:lnRef>
+          <a:fillRef idx="3">
+            <a:schemeClr val="accent1"/>
+          </a:fillRef>
+          <a:effectRef idx="2">
+            <a:schemeClr val="accent1"/>
+          </a:effectRef>
+          <a:fontRef idx="minor">
+            <a:schemeClr val="lt1"/>
+          </a:fontRef>
+        </p:style>
+        <p:txBody>
+          <a:bodyPr rtlCol="0" anchor="ctr"/>
+          <a:lstStyle/>
+          <a:p>
+            <a:pPr algn="ctr"/>
+          </a:p>
+        </p:txBody>
+      </p:sp>
+      <p:sp>
+        <p:nvSpPr>
+          <p:cNvPr id="15" name="Oval 14"/>
+          <p:cNvSpPr/>
+          <p:nvPr/>
+        </p:nvSpPr>
+        <p:spPr>
+          <a:xfrm>
+            <a:off x="1005840" y="4169664"/>
+            <a:ext cx="320040" cy="320040"/>
+          </a:xfrm>
+          <a:prstGeom prst="ellipse">
+            <a:avLst/>
+          </a:prstGeom>
+          <a:solidFill>
+            <a:srgbClr val="5046E5"/>
+          </a:solidFill>
+          <a:ln>
+            <a:noFill/>
+          </a:ln>
+        </p:spPr>
+        <p:style>
+          <a:lnRef idx="1">
+            <a:schemeClr val="accent1"/>
+          </a:lnRef>
+          <a:fillRef idx="3">
+            <a:schemeClr val="accent1"/>
+          </a:fillRef>
+          <a:effectRef idx="2">
+            <a:schemeClr val="accent1"/>
+          </a:effectRef>
+          <a:fontRef idx="minor">
+            <a:schemeClr val="lt1"/>
+          </a:fontRef>
+        </p:style>
+        <p:txBody>
+          <a:bodyPr rtlCol="0" anchor="ctr"/>
+          <a:lstStyle/>
+          <a:p>
+            <a:pPr algn="ctr"/>
+          </a:p>
+        </p:txBody>
+      </p:sp>
+      <p:sp>
+        <p:nvSpPr>
+          <p:cNvPr id="16" name="TextBox 15"/>
+          <p:cNvSpPr txBox="1"/>
+          <p:nvPr/>
+        </p:nvSpPr>
+        <p:spPr>
+          <a:xfrm>
+            <a:off x="1554480" y="3986784"/>
+            <a:ext cx="9418320" cy="777240"/>
+          </a:xfrm>
+          <a:prstGeom prst="rect">
+            <a:avLst/>
+          </a:prstGeom>
+          <a:noFill/>
+        </p:spPr>
+        <p:txBody>
+          <a:bodyPr wrap="square" anchor="ctr">
+            <a:spAutoFit/>
+          </a:bodyPr>
+          <a:lstStyle/>
+          <a:p>
+            <a:pPr algn="l">
+              <a:defRPr sz="1800" b="0">
+                <a:solidFill>
+                  <a:srgbClr val="FFFFFF"/>
+                </a:solidFill>
+                <a:latin typeface="Inter"/>
+              </a:defRPr>
+            </a:pPr>
+            <a:r>
+              <a:t>doe optimize uses L-BFGS-B with multi-start</a:t>
+            </a:r>
+          </a:p>
+        </p:txBody>
+      </p:sp>
+      <p:sp>
+        <p:nvSpPr>
+          <p:cNvPr id="17" name="Rounded Rectangle 16"/>
+          <p:cNvSpPr/>
+          <p:nvPr/>
+        </p:nvSpPr>
+        <p:spPr>
+          <a:xfrm>
+            <a:off x="731520" y="4828032"/>
+            <a:ext cx="10515600" cy="777240"/>
+          </a:xfrm>
+          <a:prstGeom prst="roundRect">
+            <a:avLst/>
+          </a:prstGeom>
+          <a:solidFill>
+            <a:srgbClr val="312E81"/>
+          </a:solidFill>
+          <a:ln>
+            <a:noFill/>
+          </a:ln>
+        </p:spPr>
+        <p:style>
+          <a:lnRef idx="1">
+            <a:schemeClr val="accent1"/>
+          </a:lnRef>
+          <a:fillRef idx="3">
+            <a:schemeClr val="accent1"/>
+          </a:fillRef>
+          <a:effectRef idx="2">
+            <a:schemeClr val="accent1"/>
+          </a:effectRef>
+          <a:fontRef idx="minor">
+            <a:schemeClr val="lt1"/>
+          </a:fontRef>
+        </p:style>
+        <p:txBody>
+          <a:bodyPr rtlCol="0" anchor="ctr"/>
+          <a:lstStyle/>
+          <a:p>
+            <a:pPr algn="ctr"/>
+          </a:p>
+        </p:txBody>
+      </p:sp>
+      <p:sp>
+        <p:nvSpPr>
+          <p:cNvPr id="18" name="Oval 17"/>
+          <p:cNvSpPr/>
+          <p:nvPr/>
+        </p:nvSpPr>
+        <p:spPr>
+          <a:xfrm>
+            <a:off x="1005840" y="5056632"/>
+            <a:ext cx="320040" cy="320040"/>
+          </a:xfrm>
+          <a:prstGeom prst="ellipse">
+            <a:avLst/>
+          </a:prstGeom>
+          <a:solidFill>
+            <a:srgbClr val="5046E5"/>
+          </a:solidFill>
+          <a:ln>
+            <a:noFill/>
+          </a:ln>
+        </p:spPr>
+        <p:style>
+          <a:lnRef idx="1">
+            <a:schemeClr val="accent1"/>
+          </a:lnRef>
+          <a:fillRef idx="3">
+            <a:schemeClr val="accent1"/>
+          </a:fillRef>
+          <a:effectRef idx="2">
+            <a:schemeClr val="accent1"/>
+          </a:effectRef>
+          <a:fontRef idx="minor">
+            <a:schemeClr val="lt1"/>
+          </a:fontRef>
+        </p:style>
+        <p:txBody>
+          <a:bodyPr rtlCol="0" anchor="ctr"/>
+          <a:lstStyle/>
+          <a:p>
+            <a:pPr algn="ctr"/>
+          </a:p>
+        </p:txBody>
+      </p:sp>
+      <p:sp>
+        <p:nvSpPr>
+          <p:cNvPr id="19" name="TextBox 18"/>
+          <p:cNvSpPr txBox="1"/>
+          <p:nvPr/>
+        </p:nvSpPr>
+        <p:spPr>
+          <a:xfrm>
+            <a:off x="1554480" y="4873752"/>
+            <a:ext cx="9418320" cy="777240"/>
+          </a:xfrm>
+          <a:prstGeom prst="rect">
+            <a:avLst/>
+          </a:prstGeom>
+          <a:noFill/>
+        </p:spPr>
+        <p:txBody>
+          <a:bodyPr wrap="square" anchor="ctr">
+            <a:spAutoFit/>
+          </a:bodyPr>
+          <a:lstStyle/>
+          <a:p>
+            <a:pPr algn="l">
+              <a:defRPr sz="1800" b="0">
+                <a:solidFill>
+                  <a:srgbClr val="FFFFFF"/>
+                </a:solidFill>
+                <a:latin typeface="Inter"/>
+              </a:defRPr>
+            </a:pPr>
+            <a:r>
+              <a:t>Steepest ascent helps when you're far from the optimum</a:t>
+            </a:r>
+          </a:p>
+        </p:txBody>
+      </p:sp>
+      <p:sp>
+        <p:nvSpPr>
+          <p:cNvPr id="20" name="TextBox 19"/>
+          <p:cNvSpPr txBox="1"/>
+          <p:nvPr/>
+        </p:nvSpPr>
+        <p:spPr>
+          <a:xfrm>
+            <a:off x="731520" y="6400800"/>
+            <a:ext cx="10058400" cy="365760"/>
+          </a:xfrm>
+          <a:prstGeom prst="rect">
+            <a:avLst/>
+          </a:prstGeom>
+          <a:noFill/>
+        </p:spPr>
+        <p:txBody>
+          <a:bodyPr wrap="square">
+            <a:spAutoFit/>
+          </a:bodyPr>
+          <a:lstStyle/>
+          <a:p>
+            <a:pPr algn="l">
+              <a:defRPr sz="1000" b="0">
+                <a:solidFill>
+                  <a:srgbClr val="6366F1"/>
+                </a:solidFill>
+                <a:latin typeface="Consolas"/>
+              </a:defRPr>
+            </a:pPr>
+            <a:r>
+              <a:t>© 2026 Martin J. Gallagher  |  GPL-3.0-or-later</a:t>
             </a:r>
           </a:p>
         </p:txBody>
